--- a/proposal/올더베러_콘텐츠유형_트렌드_2p.pptx
+++ b/proposal/올더베러_콘텐츠유형_트렌드_2p.pptx
@@ -3209,14 +3209,62 @@
       </p:sp>
       <p:sp>
         <p:nvSpPr>
-          <p:cNvPr id="5" name="TextBox 4"/>
+          <p:cNvPr id="5" name="Rounded Rectangle 4"/>
+          <p:cNvSpPr/>
+          <p:nvPr/>
+        </p:nvSpPr>
+        <p:spPr>
+          <a:xfrm>
+            <a:off x="1627632" y="1755648"/>
+            <a:ext cx="3063240" cy="548640"/>
+          </a:xfrm>
+          <a:prstGeom prst="roundRect">
+            <a:avLst>
+              <a:gd name="adj" fmla="val 8000"/>
+            </a:avLst>
+          </a:prstGeom>
+          <a:solidFill>
+            <a:srgbClr val="FFFFFF"/>
+          </a:solidFill>
+          <a:ln w="16510">
+            <a:solidFill>
+              <a:srgbClr val="3D2B1B"/>
+            </a:solidFill>
+          </a:ln>
+          <a:effectLst/>
+        </p:spPr>
+        <p:style>
+          <a:lnRef idx="1">
+            <a:schemeClr val="accent1"/>
+          </a:lnRef>
+          <a:fillRef idx="3">
+            <a:schemeClr val="accent1"/>
+          </a:fillRef>
+          <a:effectRef idx="2">
+            <a:schemeClr val="accent1"/>
+          </a:effectRef>
+          <a:fontRef idx="minor">
+            <a:schemeClr val="lt1"/>
+          </a:fontRef>
+        </p:style>
+        <p:txBody>
+          <a:bodyPr rtlCol="0" anchor="ctr"/>
+          <a:lstStyle/>
+          <a:p>
+            <a:pPr algn="ctr"/>
+          </a:p>
+        </p:txBody>
+      </p:sp>
+      <p:sp>
+        <p:nvSpPr>
+          <p:cNvPr id="6" name="TextBox 5"/>
           <p:cNvSpPr txBox="1"/>
           <p:nvPr/>
         </p:nvSpPr>
         <p:spPr>
           <a:xfrm>
-            <a:off x="1280160" y="1664208"/>
-            <a:ext cx="9628632" cy="457200"/>
+            <a:off x="1627632" y="1755648"/>
+            <a:ext cx="3063240" cy="548640"/>
           </a:xfrm>
           <a:prstGeom prst="rect">
             <a:avLst/>
@@ -3224,44 +3272,121 @@
           <a:noFill/>
         </p:spPr>
         <p:txBody>
-          <a:bodyPr wrap="square" anchor="t" lIns="0" rIns="0" tIns="0" bIns="0">
+          <a:bodyPr wrap="square" anchor="ctr" lIns="0" rIns="0" tIns="0" bIns="0">
             <a:spAutoFit/>
           </a:bodyPr>
           <a:lstStyle/>
           <a:p>
             <a:pPr algn="ctr"/>
             <a:r>
-              <a:rPr sz="1200" b="0" spc="-100">
+              <a:rPr sz="1600" b="1" spc="-100">
                 <a:solidFill>
-                  <a:srgbClr val="868680"/>
+                  <a:srgbClr val="3D2B1B"/>
                 </a:solidFill>
                 <a:latin typeface="Pretendard"/>
                 <a:ea typeface="Pretendard"/>
               </a:rPr>
-              <a:t>콘텐츠 유형별 특징 · 제작기간 · 제작비 비교</a:t>
-            </a:r>
-          </a:p>
-        </p:txBody>
-      </p:sp>
-      <p:sp>
-        <p:nvSpPr>
-          <p:cNvPr id="6" name="Rounded Rectangle 5"/>
+              <a:t>UGC</a:t>
+            </a:r>
+          </a:p>
+        </p:txBody>
+      </p:sp>
+      <p:sp>
+        <p:nvSpPr>
+          <p:cNvPr id="7" name="TextBox 6"/>
+          <p:cNvSpPr txBox="1"/>
+          <p:nvPr/>
+        </p:nvSpPr>
+        <p:spPr>
+          <a:xfrm>
+            <a:off x="1627632" y="2395728"/>
+            <a:ext cx="3063240" cy="384048"/>
+          </a:xfrm>
+          <a:prstGeom prst="rect">
+            <a:avLst/>
+          </a:prstGeom>
+          <a:noFill/>
+        </p:spPr>
+        <p:txBody>
+          <a:bodyPr wrap="square" anchor="ctr" lIns="0" rIns="0" tIns="0" bIns="0">
+            <a:spAutoFit/>
+          </a:bodyPr>
+          <a:lstStyle/>
+          <a:p>
+            <a:pPr algn="ctr"/>
+            <a:r>
+              <a:rPr sz="1100" b="1" spc="-100">
+                <a:solidFill>
+                  <a:srgbClr val="141412"/>
+                </a:solidFill>
+                <a:latin typeface="Pretendard"/>
+                <a:ea typeface="Pretendard"/>
+              </a:rPr>
+              <a:t>+ 리얼함 · 현장감</a:t>
+            </a:r>
+          </a:p>
+        </p:txBody>
+      </p:sp>
+      <p:sp>
+        <p:nvSpPr>
+          <p:cNvPr id="8" name="Rectangle 7"/>
           <p:cNvSpPr/>
           <p:nvPr/>
         </p:nvSpPr>
         <p:spPr>
           <a:xfrm>
-            <a:off x="822960" y="2194560"/>
-            <a:ext cx="3346704" cy="3675887"/>
-          </a:xfrm>
-          <a:prstGeom prst="roundRect">
-            <a:avLst>
-              <a:gd name="adj" fmla="val 8000"/>
-            </a:avLst>
+            <a:off x="1627632" y="2834640"/>
+            <a:ext cx="3063240" cy="2057400"/>
+          </a:xfrm>
+          <a:prstGeom prst="rect">
+            <a:avLst/>
           </a:prstGeom>
           <a:solidFill>
             <a:srgbClr val="FFFFFF"/>
           </a:solidFill>
+          <a:ln w="16510">
+            <a:solidFill>
+              <a:srgbClr val="C9C4B8"/>
+            </a:solidFill>
+          </a:ln>
+          <a:effectLst/>
+        </p:spPr>
+        <p:style>
+          <a:lnRef idx="1">
+            <a:schemeClr val="accent1"/>
+          </a:lnRef>
+          <a:fillRef idx="3">
+            <a:schemeClr val="accent1"/>
+          </a:fillRef>
+          <a:effectRef idx="2">
+            <a:schemeClr val="accent1"/>
+          </a:effectRef>
+          <a:fontRef idx="minor">
+            <a:schemeClr val="lt1"/>
+          </a:fontRef>
+        </p:style>
+        <p:txBody>
+          <a:bodyPr rtlCol="0" anchor="ctr"/>
+          <a:lstStyle/>
+          <a:p>
+            <a:pPr algn="ctr"/>
+          </a:p>
+        </p:txBody>
+      </p:sp>
+      <p:cxnSp>
+        <p:nvCxnSpPr>
+          <p:cNvPr id="9" name="Connector 8"/>
+          <p:cNvCxnSpPr/>
+          <p:nvPr/>
+        </p:nvCxnSpPr>
+        <p:spPr>
+          <a:xfrm>
+            <a:off x="1627632" y="2834640"/>
+            <a:ext cx="3063240" cy="2057400"/>
+          </a:xfrm>
+          <a:prstGeom prst="line">
+            <a:avLst/>
+          </a:prstGeom>
           <a:ln w="12700">
             <a:solidFill>
               <a:srgbClr val="C9C4B8"/>
@@ -3270,208 +3395,34 @@
           <a:effectLst/>
         </p:spPr>
         <p:style>
-          <a:lnRef idx="1">
+          <a:lnRef idx="2">
             <a:schemeClr val="accent1"/>
           </a:lnRef>
-          <a:fillRef idx="3">
+          <a:fillRef idx="0">
             <a:schemeClr val="accent1"/>
           </a:fillRef>
-          <a:effectRef idx="2">
+          <a:effectRef idx="1">
             <a:schemeClr val="accent1"/>
           </a:effectRef>
           <a:fontRef idx="minor">
-            <a:schemeClr val="lt1"/>
+            <a:schemeClr val="tx1"/>
           </a:fontRef>
         </p:style>
-        <p:txBody>
-          <a:bodyPr rtlCol="0" anchor="ctr"/>
-          <a:lstStyle/>
-          <a:p>
-            <a:pPr algn="ctr"/>
-          </a:p>
-        </p:txBody>
-      </p:sp>
-      <p:sp>
-        <p:nvSpPr>
-          <p:cNvPr id="7" name="Rectangle 6"/>
-          <p:cNvSpPr/>
-          <p:nvPr/>
-        </p:nvSpPr>
-        <p:spPr>
-          <a:xfrm>
-            <a:off x="822960" y="2194560"/>
-            <a:ext cx="3346704" cy="603504"/>
-          </a:xfrm>
-          <a:prstGeom prst="rect">
-            <a:avLst/>
-          </a:prstGeom>
-          <a:solidFill>
-            <a:srgbClr val="3D2B1B"/>
-          </a:solidFill>
-          <a:ln>
-            <a:noFill/>
-          </a:ln>
-          <a:effectLst/>
-        </p:spPr>
-        <p:style>
-          <a:lnRef idx="1">
-            <a:schemeClr val="accent1"/>
-          </a:lnRef>
-          <a:fillRef idx="3">
-            <a:schemeClr val="accent1"/>
-          </a:fillRef>
-          <a:effectRef idx="2">
-            <a:schemeClr val="accent1"/>
-          </a:effectRef>
-          <a:fontRef idx="minor">
-            <a:schemeClr val="lt1"/>
-          </a:fontRef>
-        </p:style>
-        <p:txBody>
-          <a:bodyPr rtlCol="0" anchor="ctr"/>
-          <a:lstStyle/>
-          <a:p>
-            <a:pPr algn="ctr"/>
-          </a:p>
-        </p:txBody>
-      </p:sp>
-      <p:sp>
-        <p:nvSpPr>
-          <p:cNvPr id="8" name="TextBox 7"/>
-          <p:cNvSpPr txBox="1"/>
-          <p:nvPr/>
-        </p:nvSpPr>
-        <p:spPr>
-          <a:xfrm>
-            <a:off x="822960" y="2194560"/>
-            <a:ext cx="3346704" cy="603504"/>
-          </a:xfrm>
-          <a:prstGeom prst="rect">
-            <a:avLst/>
-          </a:prstGeom>
-          <a:noFill/>
-        </p:spPr>
-        <p:txBody>
-          <a:bodyPr wrap="square" anchor="ctr" lIns="0" rIns="0" tIns="0" bIns="0">
-            <a:spAutoFit/>
-          </a:bodyPr>
-          <a:lstStyle/>
-          <a:p>
-            <a:pPr algn="ctr"/>
-            <a:r>
-              <a:rPr sz="1700" b="1" spc="-100">
-                <a:solidFill>
-                  <a:srgbClr val="FFFFFF"/>
-                </a:solidFill>
-                <a:latin typeface="Pretendard"/>
-                <a:ea typeface="Pretendard"/>
-              </a:rPr>
-              <a:t>UGC</a:t>
-            </a:r>
-          </a:p>
-        </p:txBody>
-      </p:sp>
-      <p:sp>
-        <p:nvSpPr>
-          <p:cNvPr id="9" name="Rounded Rectangle 8"/>
-          <p:cNvSpPr/>
-          <p:nvPr/>
-        </p:nvSpPr>
-        <p:spPr>
-          <a:xfrm>
-            <a:off x="1024128" y="2907792"/>
-            <a:ext cx="2944368" cy="457200"/>
-          </a:xfrm>
-          <a:prstGeom prst="roundRect">
-            <a:avLst>
-              <a:gd name="adj" fmla="val 8000"/>
-            </a:avLst>
-          </a:prstGeom>
-          <a:solidFill>
-            <a:srgbClr val="F3F2E7"/>
-          </a:solidFill>
-          <a:ln>
-            <a:noFill/>
-          </a:ln>
-          <a:effectLst/>
-        </p:spPr>
-        <p:style>
-          <a:lnRef idx="1">
-            <a:schemeClr val="accent1"/>
-          </a:lnRef>
-          <a:fillRef idx="3">
-            <a:schemeClr val="accent1"/>
-          </a:fillRef>
-          <a:effectRef idx="2">
-            <a:schemeClr val="accent1"/>
-          </a:effectRef>
-          <a:fontRef idx="minor">
-            <a:schemeClr val="lt1"/>
-          </a:fontRef>
-        </p:style>
-        <p:txBody>
-          <a:bodyPr rtlCol="0" anchor="ctr"/>
-          <a:lstStyle/>
-          <a:p>
-            <a:pPr algn="ctr"/>
-          </a:p>
-        </p:txBody>
-      </p:sp>
-      <p:sp>
-        <p:nvSpPr>
-          <p:cNvPr id="10" name="TextBox 9"/>
-          <p:cNvSpPr txBox="1"/>
-          <p:nvPr/>
-        </p:nvSpPr>
-        <p:spPr>
-          <a:xfrm>
-            <a:off x="1024128" y="2907792"/>
-            <a:ext cx="2944368" cy="457200"/>
-          </a:xfrm>
-          <a:prstGeom prst="rect">
-            <a:avLst/>
-          </a:prstGeom>
-          <a:noFill/>
-        </p:spPr>
-        <p:txBody>
-          <a:bodyPr wrap="square" anchor="ctr" lIns="0" rIns="0" tIns="0" bIns="0">
-            <a:spAutoFit/>
-          </a:bodyPr>
-          <a:lstStyle/>
-          <a:p>
-            <a:pPr algn="ctr"/>
-            <a:r>
-              <a:rPr sz="1050" b="1" spc="-100">
-                <a:solidFill>
-                  <a:srgbClr val="3D2B1B"/>
-                </a:solidFill>
-                <a:latin typeface="Pretendard"/>
-                <a:ea typeface="Pretendard"/>
-              </a:rPr>
-              <a:t>+ 리얼함 · 현장감</a:t>
-            </a:r>
-          </a:p>
-        </p:txBody>
-      </p:sp>
-      <p:sp>
-        <p:nvSpPr>
-          <p:cNvPr id="11" name="Rounded Rectangle 10"/>
-          <p:cNvSpPr/>
-          <p:nvPr/>
-        </p:nvSpPr>
-        <p:spPr>
-          <a:xfrm>
-            <a:off x="1097280" y="3511296"/>
-            <a:ext cx="2798064" cy="1325880"/>
-          </a:xfrm>
-          <a:prstGeom prst="roundRect">
-            <a:avLst>
-              <a:gd name="adj" fmla="val 8000"/>
-            </a:avLst>
-          </a:prstGeom>
-          <a:solidFill>
-            <a:srgbClr val="F3F2E7"/>
-          </a:solidFill>
+      </p:cxnSp>
+      <p:cxnSp>
+        <p:nvCxnSpPr>
+          <p:cNvPr id="10" name="Connector 9"/>
+          <p:cNvCxnSpPr/>
+          <p:nvPr/>
+        </p:nvCxnSpPr>
+        <p:spPr>
+          <a:xfrm flipH="1">
+            <a:off x="1627632" y="2834640"/>
+            <a:ext cx="3063240" cy="2057400"/>
+          </a:xfrm>
+          <a:prstGeom prst="line">
+            <a:avLst/>
+          </a:prstGeom>
           <a:ln w="12700">
             <a:solidFill>
               <a:srgbClr val="C9C4B8"/>
@@ -3480,37 +3431,30 @@
           <a:effectLst/>
         </p:spPr>
         <p:style>
-          <a:lnRef idx="1">
+          <a:lnRef idx="2">
             <a:schemeClr val="accent1"/>
           </a:lnRef>
-          <a:fillRef idx="3">
+          <a:fillRef idx="0">
             <a:schemeClr val="accent1"/>
           </a:fillRef>
-          <a:effectRef idx="2">
+          <a:effectRef idx="1">
             <a:schemeClr val="accent1"/>
           </a:effectRef>
           <a:fontRef idx="minor">
-            <a:schemeClr val="lt1"/>
+            <a:schemeClr val="tx1"/>
           </a:fontRef>
         </p:style>
-        <p:txBody>
-          <a:bodyPr rtlCol="0" anchor="ctr"/>
-          <a:lstStyle/>
-          <a:p>
-            <a:pPr algn="ctr"/>
-          </a:p>
-        </p:txBody>
-      </p:sp>
-      <p:sp>
-        <p:nvSpPr>
-          <p:cNvPr id="12" name="Oval 11"/>
+      </p:cxnSp>
+      <p:sp>
+        <p:nvSpPr>
+          <p:cNvPr id="11" name="Oval 10"/>
           <p:cNvSpPr/>
           <p:nvPr/>
         </p:nvSpPr>
         <p:spPr>
           <a:xfrm>
-            <a:off x="2221992" y="3790187"/>
-            <a:ext cx="548640" cy="548640"/>
+            <a:off x="2775204" y="3479291"/>
+            <a:ext cx="768096" cy="768096"/>
           </a:xfrm>
           <a:prstGeom prst="ellipse">
             <a:avLst/>
@@ -3549,14 +3493,134 @@
       </p:sp>
       <p:sp>
         <p:nvSpPr>
+          <p:cNvPr id="12" name="TextBox 11"/>
+          <p:cNvSpPr txBox="1"/>
+          <p:nvPr/>
+        </p:nvSpPr>
+        <p:spPr>
+          <a:xfrm>
+            <a:off x="2775204" y="3479291"/>
+            <a:ext cx="768096" cy="768096"/>
+          </a:xfrm>
+          <a:prstGeom prst="rect">
+            <a:avLst/>
+          </a:prstGeom>
+          <a:noFill/>
+        </p:spPr>
+        <p:txBody>
+          <a:bodyPr wrap="square" anchor="ctr" lIns="0" rIns="0" tIns="0" bIns="0">
+            <a:spAutoFit/>
+          </a:bodyPr>
+          <a:lstStyle/>
+          <a:p>
+            <a:pPr algn="ctr"/>
+            <a:r>
+              <a:rPr sz="2200" b="1" spc="-100">
+                <a:solidFill>
+                  <a:srgbClr val="3D2B1B"/>
+                </a:solidFill>
+                <a:latin typeface="Pretendard"/>
+                <a:ea typeface="Pretendard"/>
+              </a:rPr>
+              <a:t>▶</a:t>
+            </a:r>
+          </a:p>
+        </p:txBody>
+      </p:sp>
+      <p:sp>
+        <p:nvSpPr>
           <p:cNvPr id="13" name="TextBox 12"/>
           <p:cNvSpPr txBox="1"/>
           <p:nvPr/>
         </p:nvSpPr>
         <p:spPr>
           <a:xfrm>
-            <a:off x="2350008" y="3790187"/>
-            <a:ext cx="292608" cy="548640"/>
+            <a:off x="1627632" y="4562855"/>
+            <a:ext cx="3063240" cy="292608"/>
+          </a:xfrm>
+          <a:prstGeom prst="rect">
+            <a:avLst/>
+          </a:prstGeom>
+          <a:noFill/>
+        </p:spPr>
+        <p:txBody>
+          <a:bodyPr wrap="square" anchor="t" lIns="0" rIns="0" tIns="0" bIns="0">
+            <a:spAutoFit/>
+          </a:bodyPr>
+          <a:lstStyle/>
+          <a:p>
+            <a:pPr algn="ctr"/>
+            <a:r>
+              <a:rPr sz="950" b="0" spc="-100">
+                <a:solidFill>
+                  <a:srgbClr val="868680"/>
+                </a:solidFill>
+                <a:latin typeface="Pretendard"/>
+                <a:ea typeface="Pretendard"/>
+              </a:rPr>
+              <a:t>영상 예시</a:t>
+            </a:r>
+          </a:p>
+        </p:txBody>
+      </p:sp>
+      <p:sp>
+        <p:nvSpPr>
+          <p:cNvPr id="14" name="Rounded Rectangle 13"/>
+          <p:cNvSpPr/>
+          <p:nvPr/>
+        </p:nvSpPr>
+        <p:spPr>
+          <a:xfrm>
+            <a:off x="4892040" y="1755648"/>
+            <a:ext cx="3063240" cy="548640"/>
+          </a:xfrm>
+          <a:prstGeom prst="roundRect">
+            <a:avLst>
+              <a:gd name="adj" fmla="val 8000"/>
+            </a:avLst>
+          </a:prstGeom>
+          <a:solidFill>
+            <a:srgbClr val="FFFFFF"/>
+          </a:solidFill>
+          <a:ln w="16510">
+            <a:solidFill>
+              <a:srgbClr val="3D2B1B"/>
+            </a:solidFill>
+          </a:ln>
+          <a:effectLst/>
+        </p:spPr>
+        <p:style>
+          <a:lnRef idx="1">
+            <a:schemeClr val="accent1"/>
+          </a:lnRef>
+          <a:fillRef idx="3">
+            <a:schemeClr val="accent1"/>
+          </a:fillRef>
+          <a:effectRef idx="2">
+            <a:schemeClr val="accent1"/>
+          </a:effectRef>
+          <a:fontRef idx="minor">
+            <a:schemeClr val="lt1"/>
+          </a:fontRef>
+        </p:style>
+        <p:txBody>
+          <a:bodyPr rtlCol="0" anchor="ctr"/>
+          <a:lstStyle/>
+          <a:p>
+            <a:pPr algn="ctr"/>
+          </a:p>
+        </p:txBody>
+      </p:sp>
+      <p:sp>
+        <p:nvSpPr>
+          <p:cNvPr id="15" name="TextBox 14"/>
+          <p:cNvSpPr txBox="1"/>
+          <p:nvPr/>
+        </p:nvSpPr>
+        <p:spPr>
+          <a:xfrm>
+            <a:off x="4892040" y="1755648"/>
+            <a:ext cx="3063240" cy="548640"/>
           </a:xfrm>
           <a:prstGeom prst="rect">
             <a:avLst/>
@@ -3578,21 +3642,21 @@
                 <a:latin typeface="Pretendard"/>
                 <a:ea typeface="Pretendard"/>
               </a:rPr>
-              <a:t>▶</a:t>
-            </a:r>
-          </a:p>
-        </p:txBody>
-      </p:sp>
-      <p:sp>
-        <p:nvSpPr>
-          <p:cNvPr id="14" name="TextBox 13"/>
+              <a:t>EGC</a:t>
+            </a:r>
+          </a:p>
+        </p:txBody>
+      </p:sp>
+      <p:sp>
+        <p:nvSpPr>
+          <p:cNvPr id="16" name="TextBox 15"/>
           <p:cNvSpPr txBox="1"/>
           <p:nvPr/>
         </p:nvSpPr>
         <p:spPr>
           <a:xfrm>
-            <a:off x="1097280" y="4430268"/>
-            <a:ext cx="2798064" cy="310896"/>
+            <a:off x="4892040" y="2395728"/>
+            <a:ext cx="3063240" cy="384048"/>
           </a:xfrm>
           <a:prstGeom prst="rect">
             <a:avLst/>
@@ -3600,118 +3664,46 @@
           <a:noFill/>
         </p:spPr>
         <p:txBody>
-          <a:bodyPr wrap="square" anchor="t" lIns="0" rIns="0" tIns="0" bIns="0">
+          <a:bodyPr wrap="square" anchor="ctr" lIns="0" rIns="0" tIns="0" bIns="0">
             <a:spAutoFit/>
           </a:bodyPr>
           <a:lstStyle/>
           <a:p>
             <a:pPr algn="ctr"/>
             <a:r>
-              <a:rPr sz="1050" b="0" spc="-100">
-                <a:solidFill>
-                  <a:srgbClr val="868680"/>
-                </a:solidFill>
-                <a:latin typeface="Pretendard"/>
-                <a:ea typeface="Pretendard"/>
-              </a:rPr>
-              <a:t>영상 예시</a:t>
-            </a:r>
-          </a:p>
-        </p:txBody>
-      </p:sp>
-      <p:sp>
-        <p:nvSpPr>
-          <p:cNvPr id="15" name="TextBox 14"/>
-          <p:cNvSpPr txBox="1"/>
-          <p:nvPr/>
-        </p:nvSpPr>
-        <p:spPr>
-          <a:xfrm>
-            <a:off x="1097280" y="4956048"/>
-            <a:ext cx="1463040" cy="274320"/>
-          </a:xfrm>
-          <a:prstGeom prst="rect">
-            <a:avLst/>
-          </a:prstGeom>
-          <a:noFill/>
-        </p:spPr>
-        <p:txBody>
-          <a:bodyPr wrap="square" anchor="t" lIns="0" rIns="0" tIns="0" bIns="0">
-            <a:spAutoFit/>
-          </a:bodyPr>
-          <a:lstStyle/>
-          <a:p>
-            <a:pPr algn="l"/>
-            <a:r>
-              <a:rPr sz="1000" b="1" spc="-100">
-                <a:solidFill>
-                  <a:srgbClr val="868680"/>
-                </a:solidFill>
-                <a:latin typeface="Pretendard"/>
-                <a:ea typeface="Pretendard"/>
-              </a:rPr>
-              <a:t>제작기간</a:t>
-            </a:r>
-          </a:p>
-        </p:txBody>
-      </p:sp>
-      <p:sp>
-        <p:nvSpPr>
-          <p:cNvPr id="16" name="TextBox 15"/>
-          <p:cNvSpPr txBox="1"/>
-          <p:nvPr/>
-        </p:nvSpPr>
-        <p:spPr>
-          <a:xfrm>
-            <a:off x="1097280" y="4956048"/>
-            <a:ext cx="2798064" cy="274320"/>
-          </a:xfrm>
-          <a:prstGeom prst="rect">
-            <a:avLst/>
-          </a:prstGeom>
-          <a:noFill/>
-        </p:spPr>
-        <p:txBody>
-          <a:bodyPr wrap="square" anchor="t" lIns="0" rIns="0" tIns="0" bIns="0">
-            <a:spAutoFit/>
-          </a:bodyPr>
-          <a:lstStyle/>
-          <a:p>
-            <a:pPr algn="r"/>
-            <a:r>
-              <a:rPr sz="1200" b="1" spc="-100">
+              <a:rPr sz="1100" b="1" spc="-100">
                 <a:solidFill>
                   <a:srgbClr val="141412"/>
                 </a:solidFill>
                 <a:latin typeface="Pretendard"/>
                 <a:ea typeface="Pretendard"/>
               </a:rPr>
-              <a:t>3~4주</a:t>
-            </a:r>
-          </a:p>
-        </p:txBody>
-      </p:sp>
-      <p:sp>
-        <p:nvSpPr>
-          <p:cNvPr id="17" name="Rounded Rectangle 16"/>
+              <a:t>+ 미디어 커머스 (정보·전문성)</a:t>
+            </a:r>
+          </a:p>
+        </p:txBody>
+      </p:sp>
+      <p:sp>
+        <p:nvSpPr>
+          <p:cNvPr id="17" name="Rectangle 16"/>
           <p:cNvSpPr/>
           <p:nvPr/>
         </p:nvSpPr>
         <p:spPr>
           <a:xfrm>
-            <a:off x="1097280" y="5303520"/>
-            <a:ext cx="2798064" cy="457200"/>
-          </a:xfrm>
-          <a:prstGeom prst="roundRect">
-            <a:avLst>
-              <a:gd name="adj" fmla="val 8000"/>
-            </a:avLst>
+            <a:off x="4892040" y="2834640"/>
+            <a:ext cx="3063240" cy="2057400"/>
+          </a:xfrm>
+          <a:prstGeom prst="rect">
+            <a:avLst/>
           </a:prstGeom>
           <a:solidFill>
-            <a:srgbClr val="F3F2E7"/>
+            <a:srgbClr val="FFFFFF"/>
           </a:solidFill>
-          <a:ln>
-            <a:noFill/>
+          <a:ln w="16510">
+            <a:solidFill>
+              <a:srgbClr val="C9C4B8"/>
+            </a:solidFill>
           </a:ln>
           <a:effectLst/>
         </p:spPr>
@@ -3737,97 +3729,20 @@
           </a:p>
         </p:txBody>
       </p:sp>
-      <p:sp>
-        <p:nvSpPr>
-          <p:cNvPr id="18" name="TextBox 17"/>
-          <p:cNvSpPr txBox="1"/>
-          <p:nvPr/>
-        </p:nvSpPr>
-        <p:spPr>
-          <a:xfrm>
-            <a:off x="1280160" y="5303520"/>
-            <a:ext cx="1371600" cy="457200"/>
-          </a:xfrm>
-          <a:prstGeom prst="rect">
-            <a:avLst/>
-          </a:prstGeom>
-          <a:noFill/>
-        </p:spPr>
-        <p:txBody>
-          <a:bodyPr wrap="square" anchor="ctr" lIns="0" rIns="0" tIns="0" bIns="0">
-            <a:spAutoFit/>
-          </a:bodyPr>
-          <a:lstStyle/>
-          <a:p>
-            <a:pPr algn="l"/>
-            <a:r>
-              <a:rPr sz="1000" b="1" spc="-100">
-                <a:solidFill>
-                  <a:srgbClr val="868680"/>
-                </a:solidFill>
-                <a:latin typeface="Pretendard"/>
-                <a:ea typeface="Pretendard"/>
-              </a:rPr>
-              <a:t>제작비</a:t>
-            </a:r>
-          </a:p>
-        </p:txBody>
-      </p:sp>
-      <p:sp>
-        <p:nvSpPr>
-          <p:cNvPr id="19" name="TextBox 18"/>
-          <p:cNvSpPr txBox="1"/>
-          <p:nvPr/>
-        </p:nvSpPr>
-        <p:spPr>
-          <a:xfrm>
-            <a:off x="1097280" y="5303520"/>
-            <a:ext cx="2706624" cy="457200"/>
-          </a:xfrm>
-          <a:prstGeom prst="rect">
-            <a:avLst/>
-          </a:prstGeom>
-          <a:noFill/>
-        </p:spPr>
-        <p:txBody>
-          <a:bodyPr wrap="square" anchor="ctr" lIns="0" rIns="0" tIns="0" bIns="0">
-            <a:spAutoFit/>
-          </a:bodyPr>
-          <a:lstStyle/>
-          <a:p>
-            <a:pPr algn="r"/>
-            <a:r>
-              <a:rPr sz="1500" b="1" spc="-100">
-                <a:solidFill>
-                  <a:srgbClr val="3D2B1B"/>
-                </a:solidFill>
-                <a:latin typeface="Pretendard"/>
-                <a:ea typeface="Pretendard"/>
-              </a:rPr>
-              <a:t>50만원</a:t>
-            </a:r>
-          </a:p>
-        </p:txBody>
-      </p:sp>
-      <p:sp>
-        <p:nvSpPr>
-          <p:cNvPr id="20" name="Rounded Rectangle 19"/>
-          <p:cNvSpPr/>
-          <p:nvPr/>
-        </p:nvSpPr>
-        <p:spPr>
-          <a:xfrm>
-            <a:off x="4416552" y="2194560"/>
-            <a:ext cx="3346704" cy="3675887"/>
-          </a:xfrm>
-          <a:prstGeom prst="roundRect">
-            <a:avLst>
-              <a:gd name="adj" fmla="val 8000"/>
-            </a:avLst>
-          </a:prstGeom>
-          <a:solidFill>
-            <a:srgbClr val="FFFFFF"/>
-          </a:solidFill>
+      <p:cxnSp>
+        <p:nvCxnSpPr>
+          <p:cNvPr id="18" name="Connector 17"/>
+          <p:cNvCxnSpPr/>
+          <p:nvPr/>
+        </p:nvCxnSpPr>
+        <p:spPr>
+          <a:xfrm>
+            <a:off x="4892040" y="2834640"/>
+            <a:ext cx="3063239" cy="2057400"/>
+          </a:xfrm>
+          <a:prstGeom prst="line">
+            <a:avLst/>
+          </a:prstGeom>
           <a:ln w="12700">
             <a:solidFill>
               <a:srgbClr val="C9C4B8"/>
@@ -3836,208 +3751,34 @@
           <a:effectLst/>
         </p:spPr>
         <p:style>
-          <a:lnRef idx="1">
+          <a:lnRef idx="2">
             <a:schemeClr val="accent1"/>
           </a:lnRef>
-          <a:fillRef idx="3">
+          <a:fillRef idx="0">
             <a:schemeClr val="accent1"/>
           </a:fillRef>
-          <a:effectRef idx="2">
+          <a:effectRef idx="1">
             <a:schemeClr val="accent1"/>
           </a:effectRef>
           <a:fontRef idx="minor">
-            <a:schemeClr val="lt1"/>
+            <a:schemeClr val="tx1"/>
           </a:fontRef>
         </p:style>
-        <p:txBody>
-          <a:bodyPr rtlCol="0" anchor="ctr"/>
-          <a:lstStyle/>
-          <a:p>
-            <a:pPr algn="ctr"/>
-          </a:p>
-        </p:txBody>
-      </p:sp>
-      <p:sp>
-        <p:nvSpPr>
-          <p:cNvPr id="21" name="Rectangle 20"/>
-          <p:cNvSpPr/>
-          <p:nvPr/>
-        </p:nvSpPr>
-        <p:spPr>
-          <a:xfrm>
-            <a:off x="4416552" y="2194560"/>
-            <a:ext cx="3346704" cy="603504"/>
-          </a:xfrm>
-          <a:prstGeom prst="rect">
-            <a:avLst/>
-          </a:prstGeom>
-          <a:solidFill>
-            <a:srgbClr val="3D2B1B"/>
-          </a:solidFill>
-          <a:ln>
-            <a:noFill/>
-          </a:ln>
-          <a:effectLst/>
-        </p:spPr>
-        <p:style>
-          <a:lnRef idx="1">
-            <a:schemeClr val="accent1"/>
-          </a:lnRef>
-          <a:fillRef idx="3">
-            <a:schemeClr val="accent1"/>
-          </a:fillRef>
-          <a:effectRef idx="2">
-            <a:schemeClr val="accent1"/>
-          </a:effectRef>
-          <a:fontRef idx="minor">
-            <a:schemeClr val="lt1"/>
-          </a:fontRef>
-        </p:style>
-        <p:txBody>
-          <a:bodyPr rtlCol="0" anchor="ctr"/>
-          <a:lstStyle/>
-          <a:p>
-            <a:pPr algn="ctr"/>
-          </a:p>
-        </p:txBody>
-      </p:sp>
-      <p:sp>
-        <p:nvSpPr>
-          <p:cNvPr id="22" name="TextBox 21"/>
-          <p:cNvSpPr txBox="1"/>
-          <p:nvPr/>
-        </p:nvSpPr>
-        <p:spPr>
-          <a:xfrm>
-            <a:off x="4416552" y="2194560"/>
-            <a:ext cx="3346704" cy="603504"/>
-          </a:xfrm>
-          <a:prstGeom prst="rect">
-            <a:avLst/>
-          </a:prstGeom>
-          <a:noFill/>
-        </p:spPr>
-        <p:txBody>
-          <a:bodyPr wrap="square" anchor="ctr" lIns="0" rIns="0" tIns="0" bIns="0">
-            <a:spAutoFit/>
-          </a:bodyPr>
-          <a:lstStyle/>
-          <a:p>
-            <a:pPr algn="ctr"/>
-            <a:r>
-              <a:rPr sz="1700" b="1" spc="-100">
-                <a:solidFill>
-                  <a:srgbClr val="FFFFFF"/>
-                </a:solidFill>
-                <a:latin typeface="Pretendard"/>
-                <a:ea typeface="Pretendard"/>
-              </a:rPr>
-              <a:t>EGC</a:t>
-            </a:r>
-          </a:p>
-        </p:txBody>
-      </p:sp>
-      <p:sp>
-        <p:nvSpPr>
-          <p:cNvPr id="23" name="Rounded Rectangle 22"/>
-          <p:cNvSpPr/>
-          <p:nvPr/>
-        </p:nvSpPr>
-        <p:spPr>
-          <a:xfrm>
-            <a:off x="4617720" y="2907792"/>
-            <a:ext cx="2944368" cy="457200"/>
-          </a:xfrm>
-          <a:prstGeom prst="roundRect">
-            <a:avLst>
-              <a:gd name="adj" fmla="val 8000"/>
-            </a:avLst>
-          </a:prstGeom>
-          <a:solidFill>
-            <a:srgbClr val="F3F2E7"/>
-          </a:solidFill>
-          <a:ln>
-            <a:noFill/>
-          </a:ln>
-          <a:effectLst/>
-        </p:spPr>
-        <p:style>
-          <a:lnRef idx="1">
-            <a:schemeClr val="accent1"/>
-          </a:lnRef>
-          <a:fillRef idx="3">
-            <a:schemeClr val="accent1"/>
-          </a:fillRef>
-          <a:effectRef idx="2">
-            <a:schemeClr val="accent1"/>
-          </a:effectRef>
-          <a:fontRef idx="minor">
-            <a:schemeClr val="lt1"/>
-          </a:fontRef>
-        </p:style>
-        <p:txBody>
-          <a:bodyPr rtlCol="0" anchor="ctr"/>
-          <a:lstStyle/>
-          <a:p>
-            <a:pPr algn="ctr"/>
-          </a:p>
-        </p:txBody>
-      </p:sp>
-      <p:sp>
-        <p:nvSpPr>
-          <p:cNvPr id="24" name="TextBox 23"/>
-          <p:cNvSpPr txBox="1"/>
-          <p:nvPr/>
-        </p:nvSpPr>
-        <p:spPr>
-          <a:xfrm>
-            <a:off x="4617720" y="2907792"/>
-            <a:ext cx="2944368" cy="457200"/>
-          </a:xfrm>
-          <a:prstGeom prst="rect">
-            <a:avLst/>
-          </a:prstGeom>
-          <a:noFill/>
-        </p:spPr>
-        <p:txBody>
-          <a:bodyPr wrap="square" anchor="ctr" lIns="0" rIns="0" tIns="0" bIns="0">
-            <a:spAutoFit/>
-          </a:bodyPr>
-          <a:lstStyle/>
-          <a:p>
-            <a:pPr algn="ctr"/>
-            <a:r>
-              <a:rPr sz="1050" b="1" spc="-100">
-                <a:solidFill>
-                  <a:srgbClr val="3D2B1B"/>
-                </a:solidFill>
-                <a:latin typeface="Pretendard"/>
-                <a:ea typeface="Pretendard"/>
-              </a:rPr>
-              <a:t>+ 미디어 커머스 (정보·전문성)</a:t>
-            </a:r>
-          </a:p>
-        </p:txBody>
-      </p:sp>
-      <p:sp>
-        <p:nvSpPr>
-          <p:cNvPr id="25" name="Rounded Rectangle 24"/>
-          <p:cNvSpPr/>
-          <p:nvPr/>
-        </p:nvSpPr>
-        <p:spPr>
-          <a:xfrm>
-            <a:off x="4690872" y="3511296"/>
-            <a:ext cx="2798064" cy="1325880"/>
-          </a:xfrm>
-          <a:prstGeom prst="roundRect">
-            <a:avLst>
-              <a:gd name="adj" fmla="val 8000"/>
-            </a:avLst>
-          </a:prstGeom>
-          <a:solidFill>
-            <a:srgbClr val="F3F2E7"/>
-          </a:solidFill>
+      </p:cxnSp>
+      <p:cxnSp>
+        <p:nvCxnSpPr>
+          <p:cNvPr id="19" name="Connector 18"/>
+          <p:cNvCxnSpPr/>
+          <p:nvPr/>
+        </p:nvCxnSpPr>
+        <p:spPr>
+          <a:xfrm flipH="1">
+            <a:off x="4892040" y="2834640"/>
+            <a:ext cx="3063239" cy="2057400"/>
+          </a:xfrm>
+          <a:prstGeom prst="line">
+            <a:avLst/>
+          </a:prstGeom>
           <a:ln w="12700">
             <a:solidFill>
               <a:srgbClr val="C9C4B8"/>
@@ -4046,37 +3787,30 @@
           <a:effectLst/>
         </p:spPr>
         <p:style>
-          <a:lnRef idx="1">
+          <a:lnRef idx="2">
             <a:schemeClr val="accent1"/>
           </a:lnRef>
-          <a:fillRef idx="3">
+          <a:fillRef idx="0">
             <a:schemeClr val="accent1"/>
           </a:fillRef>
-          <a:effectRef idx="2">
+          <a:effectRef idx="1">
             <a:schemeClr val="accent1"/>
           </a:effectRef>
           <a:fontRef idx="minor">
-            <a:schemeClr val="lt1"/>
+            <a:schemeClr val="tx1"/>
           </a:fontRef>
         </p:style>
-        <p:txBody>
-          <a:bodyPr rtlCol="0" anchor="ctr"/>
-          <a:lstStyle/>
-          <a:p>
-            <a:pPr algn="ctr"/>
-          </a:p>
-        </p:txBody>
-      </p:sp>
-      <p:sp>
-        <p:nvSpPr>
-          <p:cNvPr id="26" name="Oval 25"/>
+      </p:cxnSp>
+      <p:sp>
+        <p:nvSpPr>
+          <p:cNvPr id="20" name="Oval 19"/>
           <p:cNvSpPr/>
           <p:nvPr/>
         </p:nvSpPr>
         <p:spPr>
           <a:xfrm>
-            <a:off x="5815584" y="3790187"/>
-            <a:ext cx="548640" cy="548640"/>
+            <a:off x="6039612" y="3479291"/>
+            <a:ext cx="768096" cy="768096"/>
           </a:xfrm>
           <a:prstGeom prst="ellipse">
             <a:avLst/>
@@ -4115,14 +3849,134 @@
       </p:sp>
       <p:sp>
         <p:nvSpPr>
-          <p:cNvPr id="27" name="TextBox 26"/>
+          <p:cNvPr id="21" name="TextBox 20"/>
           <p:cNvSpPr txBox="1"/>
           <p:nvPr/>
         </p:nvSpPr>
         <p:spPr>
           <a:xfrm>
-            <a:off x="5943600" y="3790187"/>
-            <a:ext cx="292608" cy="548640"/>
+            <a:off x="6039612" y="3479291"/>
+            <a:ext cx="768096" cy="768096"/>
+          </a:xfrm>
+          <a:prstGeom prst="rect">
+            <a:avLst/>
+          </a:prstGeom>
+          <a:noFill/>
+        </p:spPr>
+        <p:txBody>
+          <a:bodyPr wrap="square" anchor="ctr" lIns="0" rIns="0" tIns="0" bIns="0">
+            <a:spAutoFit/>
+          </a:bodyPr>
+          <a:lstStyle/>
+          <a:p>
+            <a:pPr algn="ctr"/>
+            <a:r>
+              <a:rPr sz="2200" b="1" spc="-100">
+                <a:solidFill>
+                  <a:srgbClr val="3D2B1B"/>
+                </a:solidFill>
+                <a:latin typeface="Pretendard"/>
+                <a:ea typeface="Pretendard"/>
+              </a:rPr>
+              <a:t>▶</a:t>
+            </a:r>
+          </a:p>
+        </p:txBody>
+      </p:sp>
+      <p:sp>
+        <p:nvSpPr>
+          <p:cNvPr id="22" name="TextBox 21"/>
+          <p:cNvSpPr txBox="1"/>
+          <p:nvPr/>
+        </p:nvSpPr>
+        <p:spPr>
+          <a:xfrm>
+            <a:off x="4892040" y="4562855"/>
+            <a:ext cx="3063240" cy="292608"/>
+          </a:xfrm>
+          <a:prstGeom prst="rect">
+            <a:avLst/>
+          </a:prstGeom>
+          <a:noFill/>
+        </p:spPr>
+        <p:txBody>
+          <a:bodyPr wrap="square" anchor="t" lIns="0" rIns="0" tIns="0" bIns="0">
+            <a:spAutoFit/>
+          </a:bodyPr>
+          <a:lstStyle/>
+          <a:p>
+            <a:pPr algn="ctr"/>
+            <a:r>
+              <a:rPr sz="950" b="0" spc="-100">
+                <a:solidFill>
+                  <a:srgbClr val="868680"/>
+                </a:solidFill>
+                <a:latin typeface="Pretendard"/>
+                <a:ea typeface="Pretendard"/>
+              </a:rPr>
+              <a:t>영상 예시</a:t>
+            </a:r>
+          </a:p>
+        </p:txBody>
+      </p:sp>
+      <p:sp>
+        <p:nvSpPr>
+          <p:cNvPr id="23" name="Rounded Rectangle 22"/>
+          <p:cNvSpPr/>
+          <p:nvPr/>
+        </p:nvSpPr>
+        <p:spPr>
+          <a:xfrm>
+            <a:off x="8156448" y="1755648"/>
+            <a:ext cx="3063240" cy="548640"/>
+          </a:xfrm>
+          <a:prstGeom prst="roundRect">
+            <a:avLst>
+              <a:gd name="adj" fmla="val 8000"/>
+            </a:avLst>
+          </a:prstGeom>
+          <a:solidFill>
+            <a:srgbClr val="FFFFFF"/>
+          </a:solidFill>
+          <a:ln w="16510">
+            <a:solidFill>
+              <a:srgbClr val="3D2B1B"/>
+            </a:solidFill>
+          </a:ln>
+          <a:effectLst/>
+        </p:spPr>
+        <p:style>
+          <a:lnRef idx="1">
+            <a:schemeClr val="accent1"/>
+          </a:lnRef>
+          <a:fillRef idx="3">
+            <a:schemeClr val="accent1"/>
+          </a:fillRef>
+          <a:effectRef idx="2">
+            <a:schemeClr val="accent1"/>
+          </a:effectRef>
+          <a:fontRef idx="minor">
+            <a:schemeClr val="lt1"/>
+          </a:fontRef>
+        </p:style>
+        <p:txBody>
+          <a:bodyPr rtlCol="0" anchor="ctr"/>
+          <a:lstStyle/>
+          <a:p>
+            <a:pPr algn="ctr"/>
+          </a:p>
+        </p:txBody>
+      </p:sp>
+      <p:sp>
+        <p:nvSpPr>
+          <p:cNvPr id="24" name="TextBox 23"/>
+          <p:cNvSpPr txBox="1"/>
+          <p:nvPr/>
+        </p:nvSpPr>
+        <p:spPr>
+          <a:xfrm>
+            <a:off x="8156448" y="1755648"/>
+            <a:ext cx="3063240" cy="548640"/>
           </a:xfrm>
           <a:prstGeom prst="rect">
             <a:avLst/>
@@ -4144,21 +3998,21 @@
                 <a:latin typeface="Pretendard"/>
                 <a:ea typeface="Pretendard"/>
               </a:rPr>
-              <a:t>▶</a:t>
-            </a:r>
-          </a:p>
-        </p:txBody>
-      </p:sp>
-      <p:sp>
-        <p:nvSpPr>
-          <p:cNvPr id="28" name="TextBox 27"/>
+              <a:t>Half EGC</a:t>
+            </a:r>
+          </a:p>
+        </p:txBody>
+      </p:sp>
+      <p:sp>
+        <p:nvSpPr>
+          <p:cNvPr id="25" name="TextBox 24"/>
           <p:cNvSpPr txBox="1"/>
           <p:nvPr/>
         </p:nvSpPr>
         <p:spPr>
           <a:xfrm>
-            <a:off x="4690872" y="4430268"/>
-            <a:ext cx="2798064" cy="310896"/>
+            <a:off x="8156448" y="2395728"/>
+            <a:ext cx="3063240" cy="384048"/>
           </a:xfrm>
           <a:prstGeom prst="rect">
             <a:avLst/>
@@ -4166,118 +4020,46 @@
           <a:noFill/>
         </p:spPr>
         <p:txBody>
-          <a:bodyPr wrap="square" anchor="t" lIns="0" rIns="0" tIns="0" bIns="0">
+          <a:bodyPr wrap="square" anchor="ctr" lIns="0" rIns="0" tIns="0" bIns="0">
             <a:spAutoFit/>
           </a:bodyPr>
           <a:lstStyle/>
           <a:p>
             <a:pPr algn="ctr"/>
             <a:r>
-              <a:rPr sz="1050" b="0" spc="-100">
-                <a:solidFill>
-                  <a:srgbClr val="868680"/>
-                </a:solidFill>
-                <a:latin typeface="Pretendard"/>
-                <a:ea typeface="Pretendard"/>
-              </a:rPr>
-              <a:t>영상 예시</a:t>
-            </a:r>
-          </a:p>
-        </p:txBody>
-      </p:sp>
-      <p:sp>
-        <p:nvSpPr>
-          <p:cNvPr id="29" name="TextBox 28"/>
-          <p:cNvSpPr txBox="1"/>
-          <p:nvPr/>
-        </p:nvSpPr>
-        <p:spPr>
-          <a:xfrm>
-            <a:off x="4690872" y="4956048"/>
-            <a:ext cx="1463040" cy="274320"/>
-          </a:xfrm>
-          <a:prstGeom prst="rect">
-            <a:avLst/>
-          </a:prstGeom>
-          <a:noFill/>
-        </p:spPr>
-        <p:txBody>
-          <a:bodyPr wrap="square" anchor="t" lIns="0" rIns="0" tIns="0" bIns="0">
-            <a:spAutoFit/>
-          </a:bodyPr>
-          <a:lstStyle/>
-          <a:p>
-            <a:pPr algn="l"/>
-            <a:r>
-              <a:rPr sz="1000" b="1" spc="-100">
-                <a:solidFill>
-                  <a:srgbClr val="868680"/>
-                </a:solidFill>
-                <a:latin typeface="Pretendard"/>
-                <a:ea typeface="Pretendard"/>
-              </a:rPr>
-              <a:t>제작기간</a:t>
-            </a:r>
-          </a:p>
-        </p:txBody>
-      </p:sp>
-      <p:sp>
-        <p:nvSpPr>
-          <p:cNvPr id="30" name="TextBox 29"/>
-          <p:cNvSpPr txBox="1"/>
-          <p:nvPr/>
-        </p:nvSpPr>
-        <p:spPr>
-          <a:xfrm>
-            <a:off x="4690872" y="4956048"/>
-            <a:ext cx="2798064" cy="274320"/>
-          </a:xfrm>
-          <a:prstGeom prst="rect">
-            <a:avLst/>
-          </a:prstGeom>
-          <a:noFill/>
-        </p:spPr>
-        <p:txBody>
-          <a:bodyPr wrap="square" anchor="t" lIns="0" rIns="0" tIns="0" bIns="0">
-            <a:spAutoFit/>
-          </a:bodyPr>
-          <a:lstStyle/>
-          <a:p>
-            <a:pPr algn="r"/>
-            <a:r>
-              <a:rPr sz="1200" b="1" spc="-100">
+              <a:rPr sz="1100" b="1" spc="-100">
                 <a:solidFill>
                   <a:srgbClr val="141412"/>
                 </a:solidFill>
                 <a:latin typeface="Pretendard"/>
                 <a:ea typeface="Pretendard"/>
               </a:rPr>
-              <a:t>1주</a:t>
-            </a:r>
-          </a:p>
-        </p:txBody>
-      </p:sp>
-      <p:sp>
-        <p:nvSpPr>
-          <p:cNvPr id="31" name="Rounded Rectangle 30"/>
+              <a:t>+ 소셜 에비던스 (소비자 신뢰 형성)</a:t>
+            </a:r>
+          </a:p>
+        </p:txBody>
+      </p:sp>
+      <p:sp>
+        <p:nvSpPr>
+          <p:cNvPr id="26" name="Rectangle 25"/>
           <p:cNvSpPr/>
           <p:nvPr/>
         </p:nvSpPr>
         <p:spPr>
           <a:xfrm>
-            <a:off x="4690872" y="5303520"/>
-            <a:ext cx="2798064" cy="457200"/>
-          </a:xfrm>
-          <a:prstGeom prst="roundRect">
-            <a:avLst>
-              <a:gd name="adj" fmla="val 8000"/>
-            </a:avLst>
+            <a:off x="8156448" y="2834640"/>
+            <a:ext cx="3063240" cy="2057400"/>
+          </a:xfrm>
+          <a:prstGeom prst="rect">
+            <a:avLst/>
           </a:prstGeom>
           <a:solidFill>
-            <a:srgbClr val="F3F2E7"/>
+            <a:srgbClr val="FFFFFF"/>
           </a:solidFill>
-          <a:ln>
-            <a:noFill/>
+          <a:ln w="16510">
+            <a:solidFill>
+              <a:srgbClr val="C9C4B8"/>
+            </a:solidFill>
           </a:ln>
           <a:effectLst/>
         </p:spPr>
@@ -4303,97 +4085,20 @@
           </a:p>
         </p:txBody>
       </p:sp>
-      <p:sp>
-        <p:nvSpPr>
-          <p:cNvPr id="32" name="TextBox 31"/>
-          <p:cNvSpPr txBox="1"/>
-          <p:nvPr/>
-        </p:nvSpPr>
-        <p:spPr>
-          <a:xfrm>
-            <a:off x="4873752" y="5303520"/>
-            <a:ext cx="1371600" cy="457200"/>
-          </a:xfrm>
-          <a:prstGeom prst="rect">
-            <a:avLst/>
-          </a:prstGeom>
-          <a:noFill/>
-        </p:spPr>
-        <p:txBody>
-          <a:bodyPr wrap="square" anchor="ctr" lIns="0" rIns="0" tIns="0" bIns="0">
-            <a:spAutoFit/>
-          </a:bodyPr>
-          <a:lstStyle/>
-          <a:p>
-            <a:pPr algn="l"/>
-            <a:r>
-              <a:rPr sz="1000" b="1" spc="-100">
-                <a:solidFill>
-                  <a:srgbClr val="868680"/>
-                </a:solidFill>
-                <a:latin typeface="Pretendard"/>
-                <a:ea typeface="Pretendard"/>
-              </a:rPr>
-              <a:t>제작비</a:t>
-            </a:r>
-          </a:p>
-        </p:txBody>
-      </p:sp>
-      <p:sp>
-        <p:nvSpPr>
-          <p:cNvPr id="33" name="TextBox 32"/>
-          <p:cNvSpPr txBox="1"/>
-          <p:nvPr/>
-        </p:nvSpPr>
-        <p:spPr>
-          <a:xfrm>
-            <a:off x="4690872" y="5303520"/>
-            <a:ext cx="2706624" cy="457200"/>
-          </a:xfrm>
-          <a:prstGeom prst="rect">
-            <a:avLst/>
-          </a:prstGeom>
-          <a:noFill/>
-        </p:spPr>
-        <p:txBody>
-          <a:bodyPr wrap="square" anchor="ctr" lIns="0" rIns="0" tIns="0" bIns="0">
-            <a:spAutoFit/>
-          </a:bodyPr>
-          <a:lstStyle/>
-          <a:p>
-            <a:pPr algn="r"/>
-            <a:r>
-              <a:rPr sz="1500" b="1" spc="-100">
-                <a:solidFill>
-                  <a:srgbClr val="3D2B1B"/>
-                </a:solidFill>
-                <a:latin typeface="Pretendard"/>
-                <a:ea typeface="Pretendard"/>
-              </a:rPr>
-              <a:t>100만원</a:t>
-            </a:r>
-          </a:p>
-        </p:txBody>
-      </p:sp>
-      <p:sp>
-        <p:nvSpPr>
-          <p:cNvPr id="34" name="Rounded Rectangle 33"/>
-          <p:cNvSpPr/>
-          <p:nvPr/>
-        </p:nvSpPr>
-        <p:spPr>
-          <a:xfrm>
-            <a:off x="8010144" y="2194560"/>
-            <a:ext cx="3346704" cy="3675887"/>
-          </a:xfrm>
-          <a:prstGeom prst="roundRect">
-            <a:avLst>
-              <a:gd name="adj" fmla="val 8000"/>
-            </a:avLst>
-          </a:prstGeom>
-          <a:solidFill>
-            <a:srgbClr val="FFFFFF"/>
-          </a:solidFill>
+      <p:cxnSp>
+        <p:nvCxnSpPr>
+          <p:cNvPr id="27" name="Connector 26"/>
+          <p:cNvCxnSpPr/>
+          <p:nvPr/>
+        </p:nvCxnSpPr>
+        <p:spPr>
+          <a:xfrm>
+            <a:off x="8156448" y="2834640"/>
+            <a:ext cx="3063240" cy="2057400"/>
+          </a:xfrm>
+          <a:prstGeom prst="line">
+            <a:avLst/>
+          </a:prstGeom>
           <a:ln w="12700">
             <a:solidFill>
               <a:srgbClr val="C9C4B8"/>
@@ -4402,208 +4107,34 @@
           <a:effectLst/>
         </p:spPr>
         <p:style>
-          <a:lnRef idx="1">
+          <a:lnRef idx="2">
             <a:schemeClr val="accent1"/>
           </a:lnRef>
-          <a:fillRef idx="3">
+          <a:fillRef idx="0">
             <a:schemeClr val="accent1"/>
           </a:fillRef>
-          <a:effectRef idx="2">
+          <a:effectRef idx="1">
             <a:schemeClr val="accent1"/>
           </a:effectRef>
           <a:fontRef idx="minor">
-            <a:schemeClr val="lt1"/>
+            <a:schemeClr val="tx1"/>
           </a:fontRef>
         </p:style>
-        <p:txBody>
-          <a:bodyPr rtlCol="0" anchor="ctr"/>
-          <a:lstStyle/>
-          <a:p>
-            <a:pPr algn="ctr"/>
-          </a:p>
-        </p:txBody>
-      </p:sp>
-      <p:sp>
-        <p:nvSpPr>
-          <p:cNvPr id="35" name="Rectangle 34"/>
-          <p:cNvSpPr/>
-          <p:nvPr/>
-        </p:nvSpPr>
-        <p:spPr>
-          <a:xfrm>
-            <a:off x="8010144" y="2194560"/>
-            <a:ext cx="3346704" cy="603504"/>
-          </a:xfrm>
-          <a:prstGeom prst="rect">
-            <a:avLst/>
-          </a:prstGeom>
-          <a:solidFill>
-            <a:srgbClr val="3D2B1B"/>
-          </a:solidFill>
-          <a:ln>
-            <a:noFill/>
-          </a:ln>
-          <a:effectLst/>
-        </p:spPr>
-        <p:style>
-          <a:lnRef idx="1">
-            <a:schemeClr val="accent1"/>
-          </a:lnRef>
-          <a:fillRef idx="3">
-            <a:schemeClr val="accent1"/>
-          </a:fillRef>
-          <a:effectRef idx="2">
-            <a:schemeClr val="accent1"/>
-          </a:effectRef>
-          <a:fontRef idx="minor">
-            <a:schemeClr val="lt1"/>
-          </a:fontRef>
-        </p:style>
-        <p:txBody>
-          <a:bodyPr rtlCol="0" anchor="ctr"/>
-          <a:lstStyle/>
-          <a:p>
-            <a:pPr algn="ctr"/>
-          </a:p>
-        </p:txBody>
-      </p:sp>
-      <p:sp>
-        <p:nvSpPr>
-          <p:cNvPr id="36" name="TextBox 35"/>
-          <p:cNvSpPr txBox="1"/>
-          <p:nvPr/>
-        </p:nvSpPr>
-        <p:spPr>
-          <a:xfrm>
-            <a:off x="8010144" y="2194560"/>
-            <a:ext cx="3346704" cy="603504"/>
-          </a:xfrm>
-          <a:prstGeom prst="rect">
-            <a:avLst/>
-          </a:prstGeom>
-          <a:noFill/>
-        </p:spPr>
-        <p:txBody>
-          <a:bodyPr wrap="square" anchor="ctr" lIns="0" rIns="0" tIns="0" bIns="0">
-            <a:spAutoFit/>
-          </a:bodyPr>
-          <a:lstStyle/>
-          <a:p>
-            <a:pPr algn="ctr"/>
-            <a:r>
-              <a:rPr sz="1700" b="1" spc="-100">
-                <a:solidFill>
-                  <a:srgbClr val="FFFFFF"/>
-                </a:solidFill>
-                <a:latin typeface="Pretendard"/>
-                <a:ea typeface="Pretendard"/>
-              </a:rPr>
-              <a:t>Half EGC</a:t>
-            </a:r>
-          </a:p>
-        </p:txBody>
-      </p:sp>
-      <p:sp>
-        <p:nvSpPr>
-          <p:cNvPr id="37" name="Rounded Rectangle 36"/>
-          <p:cNvSpPr/>
-          <p:nvPr/>
-        </p:nvSpPr>
-        <p:spPr>
-          <a:xfrm>
-            <a:off x="8211312" y="2907792"/>
-            <a:ext cx="2944368" cy="457200"/>
-          </a:xfrm>
-          <a:prstGeom prst="roundRect">
-            <a:avLst>
-              <a:gd name="adj" fmla="val 8000"/>
-            </a:avLst>
-          </a:prstGeom>
-          <a:solidFill>
-            <a:srgbClr val="F3F2E7"/>
-          </a:solidFill>
-          <a:ln>
-            <a:noFill/>
-          </a:ln>
-          <a:effectLst/>
-        </p:spPr>
-        <p:style>
-          <a:lnRef idx="1">
-            <a:schemeClr val="accent1"/>
-          </a:lnRef>
-          <a:fillRef idx="3">
-            <a:schemeClr val="accent1"/>
-          </a:fillRef>
-          <a:effectRef idx="2">
-            <a:schemeClr val="accent1"/>
-          </a:effectRef>
-          <a:fontRef idx="minor">
-            <a:schemeClr val="lt1"/>
-          </a:fontRef>
-        </p:style>
-        <p:txBody>
-          <a:bodyPr rtlCol="0" anchor="ctr"/>
-          <a:lstStyle/>
-          <a:p>
-            <a:pPr algn="ctr"/>
-          </a:p>
-        </p:txBody>
-      </p:sp>
-      <p:sp>
-        <p:nvSpPr>
-          <p:cNvPr id="38" name="TextBox 37"/>
-          <p:cNvSpPr txBox="1"/>
-          <p:nvPr/>
-        </p:nvSpPr>
-        <p:spPr>
-          <a:xfrm>
-            <a:off x="8211312" y="2907792"/>
-            <a:ext cx="2944368" cy="457200"/>
-          </a:xfrm>
-          <a:prstGeom prst="rect">
-            <a:avLst/>
-          </a:prstGeom>
-          <a:noFill/>
-        </p:spPr>
-        <p:txBody>
-          <a:bodyPr wrap="square" anchor="ctr" lIns="0" rIns="0" tIns="0" bIns="0">
-            <a:spAutoFit/>
-          </a:bodyPr>
-          <a:lstStyle/>
-          <a:p>
-            <a:pPr algn="ctr"/>
-            <a:r>
-              <a:rPr sz="1050" b="1" spc="-100">
-                <a:solidFill>
-                  <a:srgbClr val="3D2B1B"/>
-                </a:solidFill>
-                <a:latin typeface="Pretendard"/>
-                <a:ea typeface="Pretendard"/>
-              </a:rPr>
-              <a:t>+ 소셜 에비던스 (소비자 신뢰 형성)</a:t>
-            </a:r>
-          </a:p>
-        </p:txBody>
-      </p:sp>
-      <p:sp>
-        <p:nvSpPr>
-          <p:cNvPr id="39" name="Rounded Rectangle 38"/>
-          <p:cNvSpPr/>
-          <p:nvPr/>
-        </p:nvSpPr>
-        <p:spPr>
-          <a:xfrm>
-            <a:off x="8284464" y="3511296"/>
-            <a:ext cx="2798064" cy="1325880"/>
-          </a:xfrm>
-          <a:prstGeom prst="roundRect">
-            <a:avLst>
-              <a:gd name="adj" fmla="val 8000"/>
-            </a:avLst>
-          </a:prstGeom>
-          <a:solidFill>
-            <a:srgbClr val="F3F2E7"/>
-          </a:solidFill>
+      </p:cxnSp>
+      <p:cxnSp>
+        <p:nvCxnSpPr>
+          <p:cNvPr id="28" name="Connector 27"/>
+          <p:cNvCxnSpPr/>
+          <p:nvPr/>
+        </p:nvCxnSpPr>
+        <p:spPr>
+          <a:xfrm flipH="1">
+            <a:off x="8156448" y="2834640"/>
+            <a:ext cx="3063240" cy="2057400"/>
+          </a:xfrm>
+          <a:prstGeom prst="line">
+            <a:avLst/>
+          </a:prstGeom>
           <a:ln w="12700">
             <a:solidFill>
               <a:srgbClr val="C9C4B8"/>
@@ -4612,37 +4143,30 @@
           <a:effectLst/>
         </p:spPr>
         <p:style>
-          <a:lnRef idx="1">
+          <a:lnRef idx="2">
             <a:schemeClr val="accent1"/>
           </a:lnRef>
-          <a:fillRef idx="3">
+          <a:fillRef idx="0">
             <a:schemeClr val="accent1"/>
           </a:fillRef>
-          <a:effectRef idx="2">
+          <a:effectRef idx="1">
             <a:schemeClr val="accent1"/>
           </a:effectRef>
           <a:fontRef idx="minor">
-            <a:schemeClr val="lt1"/>
+            <a:schemeClr val="tx1"/>
           </a:fontRef>
         </p:style>
-        <p:txBody>
-          <a:bodyPr rtlCol="0" anchor="ctr"/>
-          <a:lstStyle/>
-          <a:p>
-            <a:pPr algn="ctr"/>
-          </a:p>
-        </p:txBody>
-      </p:sp>
-      <p:sp>
-        <p:nvSpPr>
-          <p:cNvPr id="40" name="Oval 39"/>
+      </p:cxnSp>
+      <p:sp>
+        <p:nvSpPr>
+          <p:cNvPr id="29" name="Oval 28"/>
           <p:cNvSpPr/>
           <p:nvPr/>
         </p:nvSpPr>
         <p:spPr>
           <a:xfrm>
-            <a:off x="9409176" y="3790187"/>
-            <a:ext cx="548640" cy="548640"/>
+            <a:off x="9304020" y="3479291"/>
+            <a:ext cx="768096" cy="768096"/>
           </a:xfrm>
           <a:prstGeom prst="ellipse">
             <a:avLst/>
@@ -4681,14 +4205,386 @@
       </p:sp>
       <p:sp>
         <p:nvSpPr>
-          <p:cNvPr id="41" name="TextBox 40"/>
+          <p:cNvPr id="30" name="TextBox 29"/>
           <p:cNvSpPr txBox="1"/>
           <p:nvPr/>
         </p:nvSpPr>
         <p:spPr>
           <a:xfrm>
-            <a:off x="9537192" y="3790187"/>
-            <a:ext cx="292608" cy="548640"/>
+            <a:off x="9304020" y="3479291"/>
+            <a:ext cx="768096" cy="768096"/>
+          </a:xfrm>
+          <a:prstGeom prst="rect">
+            <a:avLst/>
+          </a:prstGeom>
+          <a:noFill/>
+        </p:spPr>
+        <p:txBody>
+          <a:bodyPr wrap="square" anchor="ctr" lIns="0" rIns="0" tIns="0" bIns="0">
+            <a:spAutoFit/>
+          </a:bodyPr>
+          <a:lstStyle/>
+          <a:p>
+            <a:pPr algn="ctr"/>
+            <a:r>
+              <a:rPr sz="2200" b="1" spc="-100">
+                <a:solidFill>
+                  <a:srgbClr val="3D2B1B"/>
+                </a:solidFill>
+                <a:latin typeface="Pretendard"/>
+                <a:ea typeface="Pretendard"/>
+              </a:rPr>
+              <a:t>▶</a:t>
+            </a:r>
+          </a:p>
+        </p:txBody>
+      </p:sp>
+      <p:sp>
+        <p:nvSpPr>
+          <p:cNvPr id="31" name="TextBox 30"/>
+          <p:cNvSpPr txBox="1"/>
+          <p:nvPr/>
+        </p:nvSpPr>
+        <p:spPr>
+          <a:xfrm>
+            <a:off x="8156448" y="4562855"/>
+            <a:ext cx="3063240" cy="292608"/>
+          </a:xfrm>
+          <a:prstGeom prst="rect">
+            <a:avLst/>
+          </a:prstGeom>
+          <a:noFill/>
+        </p:spPr>
+        <p:txBody>
+          <a:bodyPr wrap="square" anchor="t" lIns="0" rIns="0" tIns="0" bIns="0">
+            <a:spAutoFit/>
+          </a:bodyPr>
+          <a:lstStyle/>
+          <a:p>
+            <a:pPr algn="ctr"/>
+            <a:r>
+              <a:rPr sz="950" b="0" spc="-100">
+                <a:solidFill>
+                  <a:srgbClr val="868680"/>
+                </a:solidFill>
+                <a:latin typeface="Pretendard"/>
+                <a:ea typeface="Pretendard"/>
+              </a:rPr>
+              <a:t>영상 예시</a:t>
+            </a:r>
+          </a:p>
+        </p:txBody>
+      </p:sp>
+      <p:sp>
+        <p:nvSpPr>
+          <p:cNvPr id="32" name="Rounded Rectangle 31"/>
+          <p:cNvSpPr/>
+          <p:nvPr/>
+        </p:nvSpPr>
+        <p:spPr>
+          <a:xfrm>
+            <a:off x="502920" y="5029200"/>
+            <a:ext cx="960120" cy="502920"/>
+          </a:xfrm>
+          <a:prstGeom prst="roundRect">
+            <a:avLst>
+              <a:gd name="adj" fmla="val 8000"/>
+            </a:avLst>
+          </a:prstGeom>
+          <a:solidFill>
+            <a:srgbClr val="F3F2E7"/>
+          </a:solidFill>
+          <a:ln w="16510">
+            <a:solidFill>
+              <a:srgbClr val="3D2B1B"/>
+            </a:solidFill>
+          </a:ln>
+          <a:effectLst/>
+        </p:spPr>
+        <p:style>
+          <a:lnRef idx="1">
+            <a:schemeClr val="accent1"/>
+          </a:lnRef>
+          <a:fillRef idx="3">
+            <a:schemeClr val="accent1"/>
+          </a:fillRef>
+          <a:effectRef idx="2">
+            <a:schemeClr val="accent1"/>
+          </a:effectRef>
+          <a:fontRef idx="minor">
+            <a:schemeClr val="lt1"/>
+          </a:fontRef>
+        </p:style>
+        <p:txBody>
+          <a:bodyPr rtlCol="0" anchor="ctr"/>
+          <a:lstStyle/>
+          <a:p>
+            <a:pPr algn="ctr"/>
+          </a:p>
+        </p:txBody>
+      </p:sp>
+      <p:sp>
+        <p:nvSpPr>
+          <p:cNvPr id="33" name="TextBox 32"/>
+          <p:cNvSpPr txBox="1"/>
+          <p:nvPr/>
+        </p:nvSpPr>
+        <p:spPr>
+          <a:xfrm>
+            <a:off x="502920" y="5029200"/>
+            <a:ext cx="960120" cy="502920"/>
+          </a:xfrm>
+          <a:prstGeom prst="rect">
+            <a:avLst/>
+          </a:prstGeom>
+          <a:noFill/>
+        </p:spPr>
+        <p:txBody>
+          <a:bodyPr wrap="square" anchor="ctr" lIns="0" rIns="0" tIns="0" bIns="0">
+            <a:spAutoFit/>
+          </a:bodyPr>
+          <a:lstStyle/>
+          <a:p>
+            <a:pPr algn="ctr"/>
+            <a:r>
+              <a:rPr sz="1100" b="1" spc="-100">
+                <a:solidFill>
+                  <a:srgbClr val="3D2B1B"/>
+                </a:solidFill>
+                <a:latin typeface="Pretendard"/>
+                <a:ea typeface="Pretendard"/>
+              </a:rPr>
+              <a:t>제작기간</a:t>
+            </a:r>
+          </a:p>
+        </p:txBody>
+      </p:sp>
+      <p:sp>
+        <p:nvSpPr>
+          <p:cNvPr id="34" name="Rounded Rectangle 33"/>
+          <p:cNvSpPr/>
+          <p:nvPr/>
+        </p:nvSpPr>
+        <p:spPr>
+          <a:xfrm>
+            <a:off x="502920" y="5623560"/>
+            <a:ext cx="960120" cy="566928"/>
+          </a:xfrm>
+          <a:prstGeom prst="roundRect">
+            <a:avLst>
+              <a:gd name="adj" fmla="val 8000"/>
+            </a:avLst>
+          </a:prstGeom>
+          <a:solidFill>
+            <a:srgbClr val="3D2B1B"/>
+          </a:solidFill>
+          <a:ln w="16510">
+            <a:solidFill>
+              <a:srgbClr val="3D2B1B"/>
+            </a:solidFill>
+          </a:ln>
+          <a:effectLst/>
+        </p:spPr>
+        <p:style>
+          <a:lnRef idx="1">
+            <a:schemeClr val="accent1"/>
+          </a:lnRef>
+          <a:fillRef idx="3">
+            <a:schemeClr val="accent1"/>
+          </a:fillRef>
+          <a:effectRef idx="2">
+            <a:schemeClr val="accent1"/>
+          </a:effectRef>
+          <a:fontRef idx="minor">
+            <a:schemeClr val="lt1"/>
+          </a:fontRef>
+        </p:style>
+        <p:txBody>
+          <a:bodyPr rtlCol="0" anchor="ctr"/>
+          <a:lstStyle/>
+          <a:p>
+            <a:pPr algn="ctr"/>
+          </a:p>
+        </p:txBody>
+      </p:sp>
+      <p:sp>
+        <p:nvSpPr>
+          <p:cNvPr id="35" name="TextBox 34"/>
+          <p:cNvSpPr txBox="1"/>
+          <p:nvPr/>
+        </p:nvSpPr>
+        <p:spPr>
+          <a:xfrm>
+            <a:off x="502920" y="5623560"/>
+            <a:ext cx="960120" cy="566928"/>
+          </a:xfrm>
+          <a:prstGeom prst="rect">
+            <a:avLst/>
+          </a:prstGeom>
+          <a:noFill/>
+        </p:spPr>
+        <p:txBody>
+          <a:bodyPr wrap="square" anchor="ctr" lIns="0" rIns="0" tIns="0" bIns="0">
+            <a:spAutoFit/>
+          </a:bodyPr>
+          <a:lstStyle/>
+          <a:p>
+            <a:pPr algn="ctr"/>
+            <a:r>
+              <a:rPr sz="1200" b="1" spc="-100">
+                <a:solidFill>
+                  <a:srgbClr val="FFFFFF"/>
+                </a:solidFill>
+                <a:latin typeface="Pretendard"/>
+                <a:ea typeface="Pretendard"/>
+              </a:rPr>
+              <a:t>제작비</a:t>
+            </a:r>
+          </a:p>
+        </p:txBody>
+      </p:sp>
+      <p:sp>
+        <p:nvSpPr>
+          <p:cNvPr id="36" name="Rounded Rectangle 35"/>
+          <p:cNvSpPr/>
+          <p:nvPr/>
+        </p:nvSpPr>
+        <p:spPr>
+          <a:xfrm>
+            <a:off x="1627632" y="5029200"/>
+            <a:ext cx="3063240" cy="502920"/>
+          </a:xfrm>
+          <a:prstGeom prst="roundRect">
+            <a:avLst>
+              <a:gd name="adj" fmla="val 8000"/>
+            </a:avLst>
+          </a:prstGeom>
+          <a:solidFill>
+            <a:srgbClr val="FFFFFF"/>
+          </a:solidFill>
+          <a:ln w="16510">
+            <a:solidFill>
+              <a:srgbClr val="C9C4B8"/>
+            </a:solidFill>
+          </a:ln>
+          <a:effectLst/>
+        </p:spPr>
+        <p:style>
+          <a:lnRef idx="1">
+            <a:schemeClr val="accent1"/>
+          </a:lnRef>
+          <a:fillRef idx="3">
+            <a:schemeClr val="accent1"/>
+          </a:fillRef>
+          <a:effectRef idx="2">
+            <a:schemeClr val="accent1"/>
+          </a:effectRef>
+          <a:fontRef idx="minor">
+            <a:schemeClr val="lt1"/>
+          </a:fontRef>
+        </p:style>
+        <p:txBody>
+          <a:bodyPr rtlCol="0" anchor="ctr"/>
+          <a:lstStyle/>
+          <a:p>
+            <a:pPr algn="ctr"/>
+          </a:p>
+        </p:txBody>
+      </p:sp>
+      <p:sp>
+        <p:nvSpPr>
+          <p:cNvPr id="37" name="TextBox 36"/>
+          <p:cNvSpPr txBox="1"/>
+          <p:nvPr/>
+        </p:nvSpPr>
+        <p:spPr>
+          <a:xfrm>
+            <a:off x="1627632" y="5029200"/>
+            <a:ext cx="3063240" cy="502920"/>
+          </a:xfrm>
+          <a:prstGeom prst="rect">
+            <a:avLst/>
+          </a:prstGeom>
+          <a:noFill/>
+        </p:spPr>
+        <p:txBody>
+          <a:bodyPr wrap="square" anchor="ctr" lIns="0" rIns="0" tIns="0" bIns="0">
+            <a:spAutoFit/>
+          </a:bodyPr>
+          <a:lstStyle/>
+          <a:p>
+            <a:pPr algn="ctr"/>
+            <a:r>
+              <a:rPr sz="1400" b="1" spc="-100">
+                <a:solidFill>
+                  <a:srgbClr val="141412"/>
+                </a:solidFill>
+                <a:latin typeface="Pretendard"/>
+                <a:ea typeface="Pretendard"/>
+              </a:rPr>
+              <a:t>3~4주</a:t>
+            </a:r>
+          </a:p>
+        </p:txBody>
+      </p:sp>
+      <p:sp>
+        <p:nvSpPr>
+          <p:cNvPr id="38" name="Rounded Rectangle 37"/>
+          <p:cNvSpPr/>
+          <p:nvPr/>
+        </p:nvSpPr>
+        <p:spPr>
+          <a:xfrm>
+            <a:off x="1627632" y="5623560"/>
+            <a:ext cx="3063240" cy="566928"/>
+          </a:xfrm>
+          <a:prstGeom prst="roundRect">
+            <a:avLst>
+              <a:gd name="adj" fmla="val 8000"/>
+            </a:avLst>
+          </a:prstGeom>
+          <a:solidFill>
+            <a:srgbClr val="F3F2E7"/>
+          </a:solidFill>
+          <a:ln w="16510">
+            <a:solidFill>
+              <a:srgbClr val="C9C4B8"/>
+            </a:solidFill>
+          </a:ln>
+          <a:effectLst/>
+        </p:spPr>
+        <p:style>
+          <a:lnRef idx="1">
+            <a:schemeClr val="accent1"/>
+          </a:lnRef>
+          <a:fillRef idx="3">
+            <a:schemeClr val="accent1"/>
+          </a:fillRef>
+          <a:effectRef idx="2">
+            <a:schemeClr val="accent1"/>
+          </a:effectRef>
+          <a:fontRef idx="minor">
+            <a:schemeClr val="lt1"/>
+          </a:fontRef>
+        </p:style>
+        <p:txBody>
+          <a:bodyPr rtlCol="0" anchor="ctr"/>
+          <a:lstStyle/>
+          <a:p>
+            <a:pPr algn="ctr"/>
+          </a:p>
+        </p:txBody>
+      </p:sp>
+      <p:sp>
+        <p:nvSpPr>
+          <p:cNvPr id="39" name="TextBox 38"/>
+          <p:cNvSpPr txBox="1"/>
+          <p:nvPr/>
+        </p:nvSpPr>
+        <p:spPr>
+          <a:xfrm>
+            <a:off x="1627632" y="5623560"/>
+            <a:ext cx="3063240" cy="566928"/>
           </a:xfrm>
           <a:prstGeom prst="rect">
             <a:avLst/>
@@ -4710,21 +4606,69 @@
                 <a:latin typeface="Pretendard"/>
                 <a:ea typeface="Pretendard"/>
               </a:rPr>
-              <a:t>▶</a:t>
-            </a:r>
-          </a:p>
-        </p:txBody>
-      </p:sp>
-      <p:sp>
-        <p:nvSpPr>
-          <p:cNvPr id="42" name="TextBox 41"/>
+              <a:t>50만원</a:t>
+            </a:r>
+          </a:p>
+        </p:txBody>
+      </p:sp>
+      <p:sp>
+        <p:nvSpPr>
+          <p:cNvPr id="40" name="Rounded Rectangle 39"/>
+          <p:cNvSpPr/>
+          <p:nvPr/>
+        </p:nvSpPr>
+        <p:spPr>
+          <a:xfrm>
+            <a:off x="4892040" y="5029200"/>
+            <a:ext cx="3063240" cy="502920"/>
+          </a:xfrm>
+          <a:prstGeom prst="roundRect">
+            <a:avLst>
+              <a:gd name="adj" fmla="val 8000"/>
+            </a:avLst>
+          </a:prstGeom>
+          <a:solidFill>
+            <a:srgbClr val="FFFFFF"/>
+          </a:solidFill>
+          <a:ln w="16510">
+            <a:solidFill>
+              <a:srgbClr val="C9C4B8"/>
+            </a:solidFill>
+          </a:ln>
+          <a:effectLst/>
+        </p:spPr>
+        <p:style>
+          <a:lnRef idx="1">
+            <a:schemeClr val="accent1"/>
+          </a:lnRef>
+          <a:fillRef idx="3">
+            <a:schemeClr val="accent1"/>
+          </a:fillRef>
+          <a:effectRef idx="2">
+            <a:schemeClr val="accent1"/>
+          </a:effectRef>
+          <a:fontRef idx="minor">
+            <a:schemeClr val="lt1"/>
+          </a:fontRef>
+        </p:style>
+        <p:txBody>
+          <a:bodyPr rtlCol="0" anchor="ctr"/>
+          <a:lstStyle/>
+          <a:p>
+            <a:pPr algn="ctr"/>
+          </a:p>
+        </p:txBody>
+      </p:sp>
+      <p:sp>
+        <p:nvSpPr>
+          <p:cNvPr id="41" name="TextBox 40"/>
           <p:cNvSpPr txBox="1"/>
           <p:nvPr/>
         </p:nvSpPr>
         <p:spPr>
           <a:xfrm>
-            <a:off x="8284464" y="4430268"/>
-            <a:ext cx="2798064" cy="310896"/>
+            <a:off x="4892040" y="5029200"/>
+            <a:ext cx="3063240" cy="502920"/>
           </a:xfrm>
           <a:prstGeom prst="rect">
             <a:avLst/>
@@ -4732,22 +4676,70 @@
           <a:noFill/>
         </p:spPr>
         <p:txBody>
-          <a:bodyPr wrap="square" anchor="t" lIns="0" rIns="0" tIns="0" bIns="0">
+          <a:bodyPr wrap="square" anchor="ctr" lIns="0" rIns="0" tIns="0" bIns="0">
             <a:spAutoFit/>
           </a:bodyPr>
           <a:lstStyle/>
           <a:p>
             <a:pPr algn="ctr"/>
             <a:r>
-              <a:rPr sz="1050" b="0" spc="-100">
+              <a:rPr sz="1400" b="1" spc="-100">
                 <a:solidFill>
-                  <a:srgbClr val="868680"/>
+                  <a:srgbClr val="141412"/>
                 </a:solidFill>
                 <a:latin typeface="Pretendard"/>
                 <a:ea typeface="Pretendard"/>
               </a:rPr>
-              <a:t>영상 예시</a:t>
-            </a:r>
+              <a:t>1주</a:t>
+            </a:r>
+          </a:p>
+        </p:txBody>
+      </p:sp>
+      <p:sp>
+        <p:nvSpPr>
+          <p:cNvPr id="42" name="Rounded Rectangle 41"/>
+          <p:cNvSpPr/>
+          <p:nvPr/>
+        </p:nvSpPr>
+        <p:spPr>
+          <a:xfrm>
+            <a:off x="4892040" y="5623560"/>
+            <a:ext cx="3063240" cy="566928"/>
+          </a:xfrm>
+          <a:prstGeom prst="roundRect">
+            <a:avLst>
+              <a:gd name="adj" fmla="val 8000"/>
+            </a:avLst>
+          </a:prstGeom>
+          <a:solidFill>
+            <a:srgbClr val="F3F2E7"/>
+          </a:solidFill>
+          <a:ln w="16510">
+            <a:solidFill>
+              <a:srgbClr val="C9C4B8"/>
+            </a:solidFill>
+          </a:ln>
+          <a:effectLst/>
+        </p:spPr>
+        <p:style>
+          <a:lnRef idx="1">
+            <a:schemeClr val="accent1"/>
+          </a:lnRef>
+          <a:fillRef idx="3">
+            <a:schemeClr val="accent1"/>
+          </a:fillRef>
+          <a:effectRef idx="2">
+            <a:schemeClr val="accent1"/>
+          </a:effectRef>
+          <a:fontRef idx="minor">
+            <a:schemeClr val="lt1"/>
+          </a:fontRef>
+        </p:style>
+        <p:txBody>
+          <a:bodyPr rtlCol="0" anchor="ctr"/>
+          <a:lstStyle/>
+          <a:p>
+            <a:pPr algn="ctr"/>
           </a:p>
         </p:txBody>
       </p:sp>
@@ -4759,8 +4751,8 @@
         </p:nvSpPr>
         <p:spPr>
           <a:xfrm>
-            <a:off x="8284464" y="4956048"/>
-            <a:ext cx="1463040" cy="274320"/>
+            <a:off x="4892040" y="5623560"/>
+            <a:ext cx="3063240" cy="566928"/>
           </a:xfrm>
           <a:prstGeom prst="rect">
             <a:avLst/>
@@ -4768,35 +4760,83 @@
           <a:noFill/>
         </p:spPr>
         <p:txBody>
-          <a:bodyPr wrap="square" anchor="t" lIns="0" rIns="0" tIns="0" bIns="0">
+          <a:bodyPr wrap="square" anchor="ctr" lIns="0" rIns="0" tIns="0" bIns="0">
             <a:spAutoFit/>
           </a:bodyPr>
           <a:lstStyle/>
           <a:p>
-            <a:pPr algn="l"/>
-            <a:r>
-              <a:rPr sz="1000" b="1" spc="-100">
+            <a:pPr algn="ctr"/>
+            <a:r>
+              <a:rPr sz="1600" b="1" spc="-100">
                 <a:solidFill>
-                  <a:srgbClr val="868680"/>
+                  <a:srgbClr val="3D2B1B"/>
                 </a:solidFill>
                 <a:latin typeface="Pretendard"/>
                 <a:ea typeface="Pretendard"/>
               </a:rPr>
-              <a:t>제작기간</a:t>
-            </a:r>
-          </a:p>
-        </p:txBody>
-      </p:sp>
-      <p:sp>
-        <p:nvSpPr>
-          <p:cNvPr id="44" name="TextBox 43"/>
+              <a:t>100만원</a:t>
+            </a:r>
+          </a:p>
+        </p:txBody>
+      </p:sp>
+      <p:sp>
+        <p:nvSpPr>
+          <p:cNvPr id="44" name="Rounded Rectangle 43"/>
+          <p:cNvSpPr/>
+          <p:nvPr/>
+        </p:nvSpPr>
+        <p:spPr>
+          <a:xfrm>
+            <a:off x="8156448" y="5029200"/>
+            <a:ext cx="3063240" cy="502920"/>
+          </a:xfrm>
+          <a:prstGeom prst="roundRect">
+            <a:avLst>
+              <a:gd name="adj" fmla="val 8000"/>
+            </a:avLst>
+          </a:prstGeom>
+          <a:solidFill>
+            <a:srgbClr val="FFFFFF"/>
+          </a:solidFill>
+          <a:ln w="16510">
+            <a:solidFill>
+              <a:srgbClr val="C9C4B8"/>
+            </a:solidFill>
+          </a:ln>
+          <a:effectLst/>
+        </p:spPr>
+        <p:style>
+          <a:lnRef idx="1">
+            <a:schemeClr val="accent1"/>
+          </a:lnRef>
+          <a:fillRef idx="3">
+            <a:schemeClr val="accent1"/>
+          </a:fillRef>
+          <a:effectRef idx="2">
+            <a:schemeClr val="accent1"/>
+          </a:effectRef>
+          <a:fontRef idx="minor">
+            <a:schemeClr val="lt1"/>
+          </a:fontRef>
+        </p:style>
+        <p:txBody>
+          <a:bodyPr rtlCol="0" anchor="ctr"/>
+          <a:lstStyle/>
+          <a:p>
+            <a:pPr algn="ctr"/>
+          </a:p>
+        </p:txBody>
+      </p:sp>
+      <p:sp>
+        <p:nvSpPr>
+          <p:cNvPr id="45" name="TextBox 44"/>
           <p:cNvSpPr txBox="1"/>
           <p:nvPr/>
         </p:nvSpPr>
         <p:spPr>
           <a:xfrm>
-            <a:off x="8284464" y="4956048"/>
-            <a:ext cx="2798064" cy="274320"/>
+            <a:off x="8156448" y="5029200"/>
+            <a:ext cx="3063240" cy="502920"/>
           </a:xfrm>
           <a:prstGeom prst="rect">
             <a:avLst/>
@@ -4804,14 +4844,14 @@
           <a:noFill/>
         </p:spPr>
         <p:txBody>
-          <a:bodyPr wrap="square" anchor="t" lIns="0" rIns="0" tIns="0" bIns="0">
+          <a:bodyPr wrap="square" anchor="ctr" lIns="0" rIns="0" tIns="0" bIns="0">
             <a:spAutoFit/>
           </a:bodyPr>
           <a:lstStyle/>
           <a:p>
-            <a:pPr algn="r"/>
-            <a:r>
-              <a:rPr sz="1200" b="1" spc="-100">
+            <a:pPr algn="ctr"/>
+            <a:r>
+              <a:rPr sz="1400" b="1" spc="-100">
                 <a:solidFill>
                   <a:srgbClr val="141412"/>
                 </a:solidFill>
@@ -4825,14 +4865,14 @@
       </p:sp>
       <p:sp>
         <p:nvSpPr>
-          <p:cNvPr id="45" name="Rounded Rectangle 44"/>
+          <p:cNvPr id="46" name="Rounded Rectangle 45"/>
           <p:cNvSpPr/>
           <p:nvPr/>
         </p:nvSpPr>
         <p:spPr>
           <a:xfrm>
-            <a:off x="8284464" y="5303520"/>
-            <a:ext cx="2798064" cy="457200"/>
+            <a:off x="8156448" y="5623560"/>
+            <a:ext cx="3063240" cy="566928"/>
           </a:xfrm>
           <a:prstGeom prst="roundRect">
             <a:avLst>
@@ -4842,8 +4882,10 @@
           <a:solidFill>
             <a:srgbClr val="F3F2E7"/>
           </a:solidFill>
-          <a:ln>
-            <a:noFill/>
+          <a:ln w="16510">
+            <a:solidFill>
+              <a:srgbClr val="C9C4B8"/>
+            </a:solidFill>
           </a:ln>
           <a:effectLst/>
         </p:spPr>
@@ -4871,14 +4913,14 @@
       </p:sp>
       <p:sp>
         <p:nvSpPr>
-          <p:cNvPr id="46" name="TextBox 45"/>
+          <p:cNvPr id="47" name="TextBox 46"/>
           <p:cNvSpPr txBox="1"/>
           <p:nvPr/>
         </p:nvSpPr>
         <p:spPr>
           <a:xfrm>
-            <a:off x="8467344" y="5303520"/>
-            <a:ext cx="1371600" cy="457200"/>
+            <a:off x="8156448" y="5623560"/>
+            <a:ext cx="3063240" cy="566928"/>
           </a:xfrm>
           <a:prstGeom prst="rect">
             <a:avLst/>
@@ -4891,45 +4933,9 @@
           </a:bodyPr>
           <a:lstStyle/>
           <a:p>
-            <a:pPr algn="l"/>
-            <a:r>
-              <a:rPr sz="1000" b="1" spc="-100">
-                <a:solidFill>
-                  <a:srgbClr val="868680"/>
-                </a:solidFill>
-                <a:latin typeface="Pretendard"/>
-                <a:ea typeface="Pretendard"/>
-              </a:rPr>
-              <a:t>제작비</a:t>
-            </a:r>
-          </a:p>
-        </p:txBody>
-      </p:sp>
-      <p:sp>
-        <p:nvSpPr>
-          <p:cNvPr id="47" name="TextBox 46"/>
-          <p:cNvSpPr txBox="1"/>
-          <p:nvPr/>
-        </p:nvSpPr>
-        <p:spPr>
-          <a:xfrm>
-            <a:off x="8284464" y="5303520"/>
-            <a:ext cx="2706624" cy="457200"/>
-          </a:xfrm>
-          <a:prstGeom prst="rect">
-            <a:avLst/>
-          </a:prstGeom>
-          <a:noFill/>
-        </p:spPr>
-        <p:txBody>
-          <a:bodyPr wrap="square" anchor="ctr" lIns="0" rIns="0" tIns="0" bIns="0">
-            <a:spAutoFit/>
-          </a:bodyPr>
-          <a:lstStyle/>
-          <a:p>
-            <a:pPr algn="r"/>
-            <a:r>
-              <a:rPr sz="1500" b="1" spc="-100">
+            <a:pPr algn="ctr"/>
+            <a:r>
+              <a:rPr sz="1600" b="1" spc="-100">
                 <a:solidFill>
                   <a:srgbClr val="3D2B1B"/>
                 </a:solidFill>
@@ -4949,8 +4955,8 @@
         </p:nvSpPr>
         <p:spPr>
           <a:xfrm>
-            <a:off x="8302752" y="5779008"/>
-            <a:ext cx="2798064" cy="219456"/>
+            <a:off x="8156448" y="6217920"/>
+            <a:ext cx="3063240" cy="201168"/>
           </a:xfrm>
           <a:prstGeom prst="rect">
             <a:avLst/>
@@ -4985,8 +4991,8 @@
         </p:nvSpPr>
         <p:spPr>
           <a:xfrm>
-            <a:off x="822960" y="6419088"/>
-            <a:ext cx="10543032" cy="274320"/>
+            <a:off x="502920" y="6473952"/>
+            <a:ext cx="10789920" cy="274320"/>
           </a:xfrm>
           <a:prstGeom prst="rect">
             <a:avLst/>
@@ -5021,7 +5027,7 @@
         </p:nvSpPr>
         <p:spPr>
           <a:xfrm>
-            <a:off x="5637276" y="6437376"/>
+            <a:off x="5637276" y="6446520"/>
             <a:ext cx="914400" cy="274320"/>
           </a:xfrm>
           <a:prstGeom prst="rect">
@@ -5193,8 +5199,8 @@
         </p:nvSpPr>
         <p:spPr>
           <a:xfrm>
-            <a:off x="1280160" y="1664208"/>
-            <a:ext cx="9628632" cy="457200"/>
+            <a:off x="502920" y="1783080"/>
+            <a:ext cx="2697480" cy="292608"/>
           </a:xfrm>
           <a:prstGeom prst="rect">
             <a:avLst/>
@@ -5209,41 +5215,181 @@
           <a:p>
             <a:pPr algn="ctr"/>
             <a:r>
-              <a:rPr sz="1200" b="0" spc="-100">
+              <a:rPr sz="1200" b="1" spc="-100">
+                <a:solidFill>
+                  <a:srgbClr val="3D2B1B"/>
+                </a:solidFill>
+                <a:latin typeface="Pretendard"/>
+                <a:ea typeface="Pretendard"/>
+              </a:rPr>
+              <a:t>레퍼런스 그로스</a:t>
+            </a:r>
+          </a:p>
+        </p:txBody>
+      </p:sp>
+      <p:sp>
+        <p:nvSpPr>
+          <p:cNvPr id="6" name="TextBox 5"/>
+          <p:cNvSpPr txBox="1"/>
+          <p:nvPr/>
+        </p:nvSpPr>
+        <p:spPr>
+          <a:xfrm>
+            <a:off x="502920" y="2066543"/>
+            <a:ext cx="2697480" cy="256032"/>
+          </a:xfrm>
+          <a:prstGeom prst="rect">
+            <a:avLst/>
+          </a:prstGeom>
+          <a:noFill/>
+        </p:spPr>
+        <p:txBody>
+          <a:bodyPr wrap="square" anchor="t" lIns="0" rIns="0" tIns="0" bIns="0">
+            <a:spAutoFit/>
+          </a:bodyPr>
+          <a:lstStyle/>
+          <a:p>
+            <a:pPr algn="ctr"/>
+            <a:r>
+              <a:rPr sz="950" b="0" spc="-100">
                 <a:solidFill>
                   <a:srgbClr val="868680"/>
                 </a:solidFill>
                 <a:latin typeface="Pretendard"/>
                 <a:ea typeface="Pretendard"/>
               </a:rPr>
-              <a:t>레퍼런스 → 인플루언서 → Micro-IMC : 2026, 그 다음은?</a:t>
-            </a:r>
-          </a:p>
-        </p:txBody>
-      </p:sp>
-      <p:sp>
-        <p:nvSpPr>
-          <p:cNvPr id="6" name="Rounded Rectangle 5"/>
+              <a:t>자사몰 중심</a:t>
+            </a:r>
+          </a:p>
+        </p:txBody>
+      </p:sp>
+      <p:sp>
+        <p:nvSpPr>
+          <p:cNvPr id="7" name="TextBox 6"/>
+          <p:cNvSpPr txBox="1"/>
+          <p:nvPr/>
+        </p:nvSpPr>
+        <p:spPr>
+          <a:xfrm>
+            <a:off x="3429000" y="1783080"/>
+            <a:ext cx="5074920" cy="292608"/>
+          </a:xfrm>
+          <a:prstGeom prst="rect">
+            <a:avLst/>
+          </a:prstGeom>
+          <a:noFill/>
+        </p:spPr>
+        <p:txBody>
+          <a:bodyPr wrap="square" anchor="t" lIns="0" rIns="0" tIns="0" bIns="0">
+            <a:spAutoFit/>
+          </a:bodyPr>
+          <a:lstStyle/>
+          <a:p>
+            <a:pPr algn="ctr"/>
+            <a:r>
+              <a:rPr sz="1200" b="1" spc="-100">
+                <a:solidFill>
+                  <a:srgbClr val="3D2B1B"/>
+                </a:solidFill>
+                <a:latin typeface="Pretendard"/>
+                <a:ea typeface="Pretendard"/>
+              </a:rPr>
+              <a:t>콘텐츠 그로스</a:t>
+            </a:r>
+          </a:p>
+        </p:txBody>
+      </p:sp>
+      <p:sp>
+        <p:nvSpPr>
+          <p:cNvPr id="8" name="TextBox 7"/>
+          <p:cNvSpPr txBox="1"/>
+          <p:nvPr/>
+        </p:nvSpPr>
+        <p:spPr>
+          <a:xfrm>
+            <a:off x="3429000" y="2066543"/>
+            <a:ext cx="5074920" cy="256032"/>
+          </a:xfrm>
+          <a:prstGeom prst="rect">
+            <a:avLst/>
+          </a:prstGeom>
+          <a:noFill/>
+        </p:spPr>
+        <p:txBody>
+          <a:bodyPr wrap="square" anchor="t" lIns="0" rIns="0" tIns="0" bIns="0">
+            <a:spAutoFit/>
+          </a:bodyPr>
+          <a:lstStyle/>
+          <a:p>
+            <a:pPr algn="ctr"/>
+            <a:r>
+              <a:rPr sz="950" b="0" spc="-100">
+                <a:solidFill>
+                  <a:srgbClr val="868680"/>
+                </a:solidFill>
+                <a:latin typeface="Pretendard"/>
+                <a:ea typeface="Pretendard"/>
+              </a:rPr>
+              <a:t>B2C 광고·콘텐츠 중심</a:t>
+            </a:r>
+          </a:p>
+        </p:txBody>
+      </p:sp>
+      <p:sp>
+        <p:nvSpPr>
+          <p:cNvPr id="9" name="TextBox 8"/>
+          <p:cNvSpPr txBox="1"/>
+          <p:nvPr/>
+        </p:nvSpPr>
+        <p:spPr>
+          <a:xfrm>
+            <a:off x="8823960" y="1783080"/>
+            <a:ext cx="2862072" cy="292608"/>
+          </a:xfrm>
+          <a:prstGeom prst="rect">
+            <a:avLst/>
+          </a:prstGeom>
+          <a:noFill/>
+        </p:spPr>
+        <p:txBody>
+          <a:bodyPr wrap="square" anchor="t" lIns="0" rIns="0" tIns="0" bIns="0">
+            <a:spAutoFit/>
+          </a:bodyPr>
+          <a:lstStyle/>
+          <a:p>
+            <a:pPr algn="ctr"/>
+            <a:r>
+              <a:rPr sz="1200" b="1" spc="-100">
+                <a:solidFill>
+                  <a:srgbClr val="3D2B1B"/>
+                </a:solidFill>
+                <a:latin typeface="Pretendard"/>
+                <a:ea typeface="Pretendard"/>
+              </a:rPr>
+              <a:t>2026.06  What’s Next?</a:t>
+            </a:r>
+          </a:p>
+        </p:txBody>
+      </p:sp>
+      <p:sp>
+        <p:nvSpPr>
+          <p:cNvPr id="10" name="Chevron 9"/>
           <p:cNvSpPr/>
           <p:nvPr/>
         </p:nvSpPr>
         <p:spPr>
           <a:xfrm>
-            <a:off x="822960" y="2331720"/>
-            <a:ext cx="2926080" cy="3520440"/>
-          </a:xfrm>
-          <a:prstGeom prst="roundRect">
-            <a:avLst>
-              <a:gd name="adj" fmla="val 8000"/>
-            </a:avLst>
+            <a:off x="3218688" y="1874519"/>
+            <a:ext cx="256032" cy="256032"/>
+          </a:xfrm>
+          <a:prstGeom prst="chevron">
+            <a:avLst/>
           </a:prstGeom>
           <a:solidFill>
-            <a:srgbClr val="FFFFFF"/>
+            <a:srgbClr val="0E5A30"/>
           </a:solidFill>
-          <a:ln w="12700">
-            <a:solidFill>
-              <a:srgbClr val="C9C4B8"/>
-            </a:solidFill>
+          <a:ln>
+            <a:noFill/>
           </a:ln>
           <a:effectLst/>
         </p:spPr>
@@ -5271,17 +5417,1418 @@
       </p:sp>
       <p:sp>
         <p:nvSpPr>
-          <p:cNvPr id="7" name="Rectangle 6"/>
+          <p:cNvPr id="11" name="Chevron 10"/>
           <p:cNvSpPr/>
           <p:nvPr/>
         </p:nvSpPr>
         <p:spPr>
           <a:xfrm>
-            <a:off x="822960" y="2331720"/>
-            <a:ext cx="2926080" cy="566928"/>
+            <a:off x="8522208" y="1874519"/>
+            <a:ext cx="256032" cy="256032"/>
+          </a:xfrm>
+          <a:prstGeom prst="chevron">
+            <a:avLst/>
+          </a:prstGeom>
+          <a:solidFill>
+            <a:srgbClr val="0E5A30"/>
+          </a:solidFill>
+          <a:ln>
+            <a:noFill/>
+          </a:ln>
+          <a:effectLst/>
+        </p:spPr>
+        <p:style>
+          <a:lnRef idx="1">
+            <a:schemeClr val="accent1"/>
+          </a:lnRef>
+          <a:fillRef idx="3">
+            <a:schemeClr val="accent1"/>
+          </a:fillRef>
+          <a:effectRef idx="2">
+            <a:schemeClr val="accent1"/>
+          </a:effectRef>
+          <a:fontRef idx="minor">
+            <a:schemeClr val="lt1"/>
+          </a:fontRef>
+        </p:style>
+        <p:txBody>
+          <a:bodyPr rtlCol="0" anchor="ctr"/>
+          <a:lstStyle/>
+          <a:p>
+            <a:pPr algn="ctr"/>
+          </a:p>
+        </p:txBody>
+      </p:sp>
+      <p:sp>
+        <p:nvSpPr>
+          <p:cNvPr id="12" name="Rounded Rectangle 11"/>
+          <p:cNvSpPr/>
+          <p:nvPr/>
+        </p:nvSpPr>
+        <p:spPr>
+          <a:xfrm>
+            <a:off x="502920" y="2395728"/>
+            <a:ext cx="2697480" cy="3611880"/>
+          </a:xfrm>
+          <a:prstGeom prst="roundRect">
+            <a:avLst>
+              <a:gd name="adj" fmla="val 8000"/>
+            </a:avLst>
+          </a:prstGeom>
+          <a:solidFill>
+            <a:srgbClr val="FFFFFF"/>
+          </a:solidFill>
+          <a:ln w="19050">
+            <a:solidFill>
+              <a:srgbClr val="3D2B1B"/>
+            </a:solidFill>
+          </a:ln>
+          <a:effectLst/>
+        </p:spPr>
+        <p:style>
+          <a:lnRef idx="1">
+            <a:schemeClr val="accent1"/>
+          </a:lnRef>
+          <a:fillRef idx="3">
+            <a:schemeClr val="accent1"/>
+          </a:fillRef>
+          <a:effectRef idx="2">
+            <a:schemeClr val="accent1"/>
+          </a:effectRef>
+          <a:fontRef idx="minor">
+            <a:schemeClr val="lt1"/>
+          </a:fontRef>
+        </p:style>
+        <p:txBody>
+          <a:bodyPr rtlCol="0" anchor="ctr"/>
+          <a:lstStyle/>
+          <a:p>
+            <a:pPr algn="ctr"/>
+          </a:p>
+        </p:txBody>
+      </p:sp>
+      <p:sp>
+        <p:nvSpPr>
+          <p:cNvPr id="13" name="Rounded Rectangle 12"/>
+          <p:cNvSpPr/>
+          <p:nvPr/>
+        </p:nvSpPr>
+        <p:spPr>
+          <a:xfrm>
+            <a:off x="685800" y="2560320"/>
+            <a:ext cx="2331720" cy="548640"/>
+          </a:xfrm>
+          <a:prstGeom prst="roundRect">
+            <a:avLst>
+              <a:gd name="adj" fmla="val 8000"/>
+            </a:avLst>
+          </a:prstGeom>
+          <a:solidFill>
+            <a:srgbClr val="3D2B1B"/>
+          </a:solidFill>
+          <a:ln w="16510">
+            <a:solidFill>
+              <a:srgbClr val="3D2B1B"/>
+            </a:solidFill>
+          </a:ln>
+          <a:effectLst/>
+        </p:spPr>
+        <p:style>
+          <a:lnRef idx="1">
+            <a:schemeClr val="accent1"/>
+          </a:lnRef>
+          <a:fillRef idx="3">
+            <a:schemeClr val="accent1"/>
+          </a:fillRef>
+          <a:effectRef idx="2">
+            <a:schemeClr val="accent1"/>
+          </a:effectRef>
+          <a:fontRef idx="minor">
+            <a:schemeClr val="lt1"/>
+          </a:fontRef>
+        </p:style>
+        <p:txBody>
+          <a:bodyPr rtlCol="0" anchor="ctr"/>
+          <a:lstStyle/>
+          <a:p>
+            <a:pPr algn="ctr"/>
+          </a:p>
+        </p:txBody>
+      </p:sp>
+      <p:sp>
+        <p:nvSpPr>
+          <p:cNvPr id="14" name="TextBox 13"/>
+          <p:cNvSpPr txBox="1"/>
+          <p:nvPr/>
+        </p:nvSpPr>
+        <p:spPr>
+          <a:xfrm>
+            <a:off x="685800" y="2560320"/>
+            <a:ext cx="2331720" cy="548640"/>
           </a:xfrm>
           <a:prstGeom prst="rect">
             <a:avLst/>
+          </a:prstGeom>
+          <a:noFill/>
+        </p:spPr>
+        <p:txBody>
+          <a:bodyPr wrap="square" anchor="ctr" lIns="0" rIns="0" tIns="0" bIns="0">
+            <a:spAutoFit/>
+          </a:bodyPr>
+          <a:lstStyle/>
+          <a:p>
+            <a:pPr algn="ctr"/>
+            <a:r>
+              <a:rPr sz="1150" b="1" spc="-100">
+                <a:solidFill>
+                  <a:srgbClr val="FFFFFF"/>
+                </a:solidFill>
+                <a:latin typeface="Pretendard"/>
+                <a:ea typeface="Pretendard"/>
+              </a:rPr>
+              <a:t>레퍼런스 마케팅 Era</a:t>
+            </a:r>
+          </a:p>
+        </p:txBody>
+      </p:sp>
+      <p:cxnSp>
+        <p:nvCxnSpPr>
+          <p:cNvPr id="15" name="Connector 14"/>
+          <p:cNvCxnSpPr/>
+          <p:nvPr/>
+        </p:nvCxnSpPr>
+        <p:spPr>
+          <a:xfrm>
+            <a:off x="1851660" y="3172968"/>
+            <a:ext cx="0" cy="822960"/>
+          </a:xfrm>
+          <a:prstGeom prst="line">
+            <a:avLst/>
+          </a:prstGeom>
+          <a:ln w="15240">
+            <a:solidFill>
+              <a:srgbClr val="868680"/>
+            </a:solidFill>
+            <a:prstDash val="dash"/>
+          </a:ln>
+          <a:effectLst/>
+        </p:spPr>
+        <p:style>
+          <a:lnRef idx="2">
+            <a:schemeClr val="accent1"/>
+          </a:lnRef>
+          <a:fillRef idx="0">
+            <a:schemeClr val="accent1"/>
+          </a:fillRef>
+          <a:effectRef idx="1">
+            <a:schemeClr val="accent1"/>
+          </a:effectRef>
+          <a:fontRef idx="minor">
+            <a:schemeClr val="tx1"/>
+          </a:fontRef>
+        </p:style>
+      </p:cxnSp>
+      <p:sp>
+        <p:nvSpPr>
+          <p:cNvPr id="16" name="Rounded Rectangle 15"/>
+          <p:cNvSpPr/>
+          <p:nvPr/>
+        </p:nvSpPr>
+        <p:spPr>
+          <a:xfrm>
+            <a:off x="822960" y="3995928"/>
+            <a:ext cx="2057400" cy="658368"/>
+          </a:xfrm>
+          <a:prstGeom prst="roundRect">
+            <a:avLst>
+              <a:gd name="adj" fmla="val 8000"/>
+            </a:avLst>
+          </a:prstGeom>
+          <a:solidFill>
+            <a:srgbClr val="F3F2E7"/>
+          </a:solidFill>
+          <a:ln w="16510">
+            <a:solidFill>
+              <a:srgbClr val="3D2B1B"/>
+            </a:solidFill>
+          </a:ln>
+          <a:effectLst/>
+        </p:spPr>
+        <p:style>
+          <a:lnRef idx="1">
+            <a:schemeClr val="accent1"/>
+          </a:lnRef>
+          <a:fillRef idx="3">
+            <a:schemeClr val="accent1"/>
+          </a:fillRef>
+          <a:effectRef idx="2">
+            <a:schemeClr val="accent1"/>
+          </a:effectRef>
+          <a:fontRef idx="minor">
+            <a:schemeClr val="lt1"/>
+          </a:fontRef>
+        </p:style>
+        <p:txBody>
+          <a:bodyPr rtlCol="0" anchor="ctr"/>
+          <a:lstStyle/>
+          <a:p>
+            <a:pPr algn="ctr"/>
+          </a:p>
+        </p:txBody>
+      </p:sp>
+      <p:sp>
+        <p:nvSpPr>
+          <p:cNvPr id="17" name="TextBox 16"/>
+          <p:cNvSpPr txBox="1"/>
+          <p:nvPr/>
+        </p:nvSpPr>
+        <p:spPr>
+          <a:xfrm>
+            <a:off x="822960" y="3995928"/>
+            <a:ext cx="2057400" cy="658368"/>
+          </a:xfrm>
+          <a:prstGeom prst="rect">
+            <a:avLst/>
+          </a:prstGeom>
+          <a:noFill/>
+        </p:spPr>
+        <p:txBody>
+          <a:bodyPr wrap="square" anchor="ctr" lIns="0" rIns="0" tIns="0" bIns="0">
+            <a:spAutoFit/>
+          </a:bodyPr>
+          <a:lstStyle/>
+          <a:p>
+            <a:pPr algn="ctr"/>
+            <a:r>
+              <a:rPr sz="1200" b="1" spc="-100">
+                <a:solidFill>
+                  <a:srgbClr val="3D2B1B"/>
+                </a:solidFill>
+                <a:latin typeface="Pretendard"/>
+                <a:ea typeface="Pretendard"/>
+              </a:rPr>
+              <a:t>미디어 커머스</a:t>
+            </a:r>
+          </a:p>
+        </p:txBody>
+      </p:sp>
+      <p:sp>
+        <p:nvSpPr>
+          <p:cNvPr id="18" name="TextBox 17"/>
+          <p:cNvSpPr txBox="1"/>
+          <p:nvPr/>
+        </p:nvSpPr>
+        <p:spPr>
+          <a:xfrm>
+            <a:off x="731520" y="4864608"/>
+            <a:ext cx="2240280" cy="822960"/>
+          </a:xfrm>
+          <a:prstGeom prst="rect">
+            <a:avLst/>
+          </a:prstGeom>
+          <a:noFill/>
+        </p:spPr>
+        <p:txBody>
+          <a:bodyPr wrap="square" anchor="t" lIns="0" rIns="0" tIns="0" bIns="0">
+            <a:spAutoFit/>
+          </a:bodyPr>
+          <a:lstStyle/>
+          <a:p>
+            <a:pPr algn="ctr"/>
+            <a:r>
+              <a:rPr sz="950" b="0" spc="-100">
+                <a:solidFill>
+                  <a:srgbClr val="868680"/>
+                </a:solidFill>
+                <a:latin typeface="Pretendard"/>
+                <a:ea typeface="Pretendard"/>
+              </a:rPr>
+              <a:t>자사몰·리테일 레퍼런스
+중심으로 성장하던 시기</a:t>
+            </a:r>
+          </a:p>
+        </p:txBody>
+      </p:sp>
+      <p:sp>
+        <p:nvSpPr>
+          <p:cNvPr id="19" name="Rounded Rectangle 18"/>
+          <p:cNvSpPr/>
+          <p:nvPr/>
+        </p:nvSpPr>
+        <p:spPr>
+          <a:xfrm>
+            <a:off x="3429000" y="2395728"/>
+            <a:ext cx="5074920" cy="3611880"/>
+          </a:xfrm>
+          <a:prstGeom prst="roundRect">
+            <a:avLst>
+              <a:gd name="adj" fmla="val 8000"/>
+            </a:avLst>
+          </a:prstGeom>
+          <a:solidFill>
+            <a:srgbClr val="FFFFFF"/>
+          </a:solidFill>
+          <a:ln w="19050">
+            <a:solidFill>
+              <a:srgbClr val="3D2B1B"/>
+            </a:solidFill>
+          </a:ln>
+          <a:effectLst/>
+        </p:spPr>
+        <p:style>
+          <a:lnRef idx="1">
+            <a:schemeClr val="accent1"/>
+          </a:lnRef>
+          <a:fillRef idx="3">
+            <a:schemeClr val="accent1"/>
+          </a:fillRef>
+          <a:effectRef idx="2">
+            <a:schemeClr val="accent1"/>
+          </a:effectRef>
+          <a:fontRef idx="minor">
+            <a:schemeClr val="lt1"/>
+          </a:fontRef>
+        </p:style>
+        <p:txBody>
+          <a:bodyPr rtlCol="0" anchor="ctr"/>
+          <a:lstStyle/>
+          <a:p>
+            <a:pPr algn="ctr"/>
+          </a:p>
+        </p:txBody>
+      </p:sp>
+      <p:sp>
+        <p:nvSpPr>
+          <p:cNvPr id="20" name="Rounded Rectangle 19"/>
+          <p:cNvSpPr/>
+          <p:nvPr/>
+        </p:nvSpPr>
+        <p:spPr>
+          <a:xfrm>
+            <a:off x="3657600" y="2560320"/>
+            <a:ext cx="4617720" cy="502920"/>
+          </a:xfrm>
+          <a:prstGeom prst="roundRect">
+            <a:avLst>
+              <a:gd name="adj" fmla="val 8000"/>
+            </a:avLst>
+          </a:prstGeom>
+          <a:solidFill>
+            <a:srgbClr val="3D2B1B"/>
+          </a:solidFill>
+          <a:ln w="16510">
+            <a:solidFill>
+              <a:srgbClr val="3D2B1B"/>
+            </a:solidFill>
+          </a:ln>
+          <a:effectLst/>
+        </p:spPr>
+        <p:style>
+          <a:lnRef idx="1">
+            <a:schemeClr val="accent1"/>
+          </a:lnRef>
+          <a:fillRef idx="3">
+            <a:schemeClr val="accent1"/>
+          </a:fillRef>
+          <a:effectRef idx="2">
+            <a:schemeClr val="accent1"/>
+          </a:effectRef>
+          <a:fontRef idx="minor">
+            <a:schemeClr val="lt1"/>
+          </a:fontRef>
+        </p:style>
+        <p:txBody>
+          <a:bodyPr rtlCol="0" anchor="ctr"/>
+          <a:lstStyle/>
+          <a:p>
+            <a:pPr algn="ctr"/>
+          </a:p>
+        </p:txBody>
+      </p:sp>
+      <p:sp>
+        <p:nvSpPr>
+          <p:cNvPr id="21" name="TextBox 20"/>
+          <p:cNvSpPr txBox="1"/>
+          <p:nvPr/>
+        </p:nvSpPr>
+        <p:spPr>
+          <a:xfrm>
+            <a:off x="3657600" y="2560320"/>
+            <a:ext cx="4617720" cy="502920"/>
+          </a:xfrm>
+          <a:prstGeom prst="rect">
+            <a:avLst/>
+          </a:prstGeom>
+          <a:noFill/>
+        </p:spPr>
+        <p:txBody>
+          <a:bodyPr wrap="square" anchor="ctr" lIns="0" rIns="0" tIns="0" bIns="0">
+            <a:spAutoFit/>
+          </a:bodyPr>
+          <a:lstStyle/>
+          <a:p>
+            <a:pPr algn="ctr"/>
+            <a:r>
+              <a:rPr sz="1200" b="1" spc="-100">
+                <a:solidFill>
+                  <a:srgbClr val="FFFFFF"/>
+                </a:solidFill>
+                <a:latin typeface="Pretendard"/>
+                <a:ea typeface="Pretendard"/>
+              </a:rPr>
+              <a:t>인플루언서 마케팅 Era</a:t>
+            </a:r>
+          </a:p>
+        </p:txBody>
+      </p:sp>
+      <p:sp>
+        <p:nvSpPr>
+          <p:cNvPr id="22" name="Rounded Rectangle 21"/>
+          <p:cNvSpPr/>
+          <p:nvPr/>
+        </p:nvSpPr>
+        <p:spPr>
+          <a:xfrm>
+            <a:off x="3703320" y="3310128"/>
+            <a:ext cx="1371600" cy="457200"/>
+          </a:xfrm>
+          <a:prstGeom prst="roundRect">
+            <a:avLst>
+              <a:gd name="adj" fmla="val 8000"/>
+            </a:avLst>
+          </a:prstGeom>
+          <a:solidFill>
+            <a:srgbClr val="FFFFFF"/>
+          </a:solidFill>
+          <a:ln w="16510">
+            <a:solidFill>
+              <a:srgbClr val="3D2B1B"/>
+            </a:solidFill>
+          </a:ln>
+          <a:effectLst/>
+        </p:spPr>
+        <p:style>
+          <a:lnRef idx="1">
+            <a:schemeClr val="accent1"/>
+          </a:lnRef>
+          <a:fillRef idx="3">
+            <a:schemeClr val="accent1"/>
+          </a:fillRef>
+          <a:effectRef idx="2">
+            <a:schemeClr val="accent1"/>
+          </a:effectRef>
+          <a:fontRef idx="minor">
+            <a:schemeClr val="lt1"/>
+          </a:fontRef>
+        </p:style>
+        <p:txBody>
+          <a:bodyPr rtlCol="0" anchor="ctr"/>
+          <a:lstStyle/>
+          <a:p>
+            <a:pPr algn="ctr"/>
+          </a:p>
+        </p:txBody>
+      </p:sp>
+      <p:sp>
+        <p:nvSpPr>
+          <p:cNvPr id="23" name="TextBox 22"/>
+          <p:cNvSpPr txBox="1"/>
+          <p:nvPr/>
+        </p:nvSpPr>
+        <p:spPr>
+          <a:xfrm>
+            <a:off x="3703320" y="3310128"/>
+            <a:ext cx="1371600" cy="457200"/>
+          </a:xfrm>
+          <a:prstGeom prst="rect">
+            <a:avLst/>
+          </a:prstGeom>
+          <a:noFill/>
+        </p:spPr>
+        <p:txBody>
+          <a:bodyPr wrap="square" anchor="ctr" lIns="0" rIns="0" tIns="0" bIns="0">
+            <a:spAutoFit/>
+          </a:bodyPr>
+          <a:lstStyle/>
+          <a:p>
+            <a:pPr algn="ctr"/>
+            <a:r>
+              <a:rPr sz="1100" b="1" spc="-100">
+                <a:solidFill>
+                  <a:srgbClr val="141412"/>
+                </a:solidFill>
+                <a:latin typeface="Pretendard"/>
+                <a:ea typeface="Pretendard"/>
+              </a:rPr>
+              <a:t>① MCN</a:t>
+            </a:r>
+          </a:p>
+        </p:txBody>
+      </p:sp>
+      <p:cxnSp>
+        <p:nvCxnSpPr>
+          <p:cNvPr id="24" name="Connector 23"/>
+          <p:cNvCxnSpPr/>
+          <p:nvPr/>
+        </p:nvCxnSpPr>
+        <p:spPr>
+          <a:xfrm>
+            <a:off x="4389120" y="3785616"/>
+            <a:ext cx="0" cy="484632"/>
+          </a:xfrm>
+          <a:prstGeom prst="line">
+            <a:avLst/>
+          </a:prstGeom>
+          <a:ln w="15240">
+            <a:solidFill>
+              <a:srgbClr val="868680"/>
+            </a:solidFill>
+            <a:prstDash val="dash"/>
+          </a:ln>
+          <a:effectLst/>
+        </p:spPr>
+        <p:style>
+          <a:lnRef idx="2">
+            <a:schemeClr val="accent1"/>
+          </a:lnRef>
+          <a:fillRef idx="0">
+            <a:schemeClr val="accent1"/>
+          </a:fillRef>
+          <a:effectRef idx="1">
+            <a:schemeClr val="accent1"/>
+          </a:effectRef>
+          <a:fontRef idx="minor">
+            <a:schemeClr val="tx1"/>
+          </a:fontRef>
+        </p:style>
+      </p:cxnSp>
+      <p:sp>
+        <p:nvSpPr>
+          <p:cNvPr id="25" name="Rounded Rectangle 24"/>
+          <p:cNvSpPr/>
+          <p:nvPr/>
+        </p:nvSpPr>
+        <p:spPr>
+          <a:xfrm>
+            <a:off x="3703320" y="4270248"/>
+            <a:ext cx="1371600" cy="457200"/>
+          </a:xfrm>
+          <a:prstGeom prst="roundRect">
+            <a:avLst>
+              <a:gd name="adj" fmla="val 8000"/>
+            </a:avLst>
+          </a:prstGeom>
+          <a:solidFill>
+            <a:srgbClr val="F3F2E7"/>
+          </a:solidFill>
+          <a:ln w="16510">
+            <a:solidFill>
+              <a:srgbClr val="3D2B1B"/>
+            </a:solidFill>
+          </a:ln>
+          <a:effectLst/>
+        </p:spPr>
+        <p:style>
+          <a:lnRef idx="1">
+            <a:schemeClr val="accent1"/>
+          </a:lnRef>
+          <a:fillRef idx="3">
+            <a:schemeClr val="accent1"/>
+          </a:fillRef>
+          <a:effectRef idx="2">
+            <a:schemeClr val="accent1"/>
+          </a:effectRef>
+          <a:fontRef idx="minor">
+            <a:schemeClr val="lt1"/>
+          </a:fontRef>
+        </p:style>
+        <p:txBody>
+          <a:bodyPr rtlCol="0" anchor="ctr"/>
+          <a:lstStyle/>
+          <a:p>
+            <a:pPr algn="ctr"/>
+          </a:p>
+        </p:txBody>
+      </p:sp>
+      <p:sp>
+        <p:nvSpPr>
+          <p:cNvPr id="26" name="TextBox 25"/>
+          <p:cNvSpPr txBox="1"/>
+          <p:nvPr/>
+        </p:nvSpPr>
+        <p:spPr>
+          <a:xfrm>
+            <a:off x="3703320" y="4270248"/>
+            <a:ext cx="1371600" cy="457200"/>
+          </a:xfrm>
+          <a:prstGeom prst="rect">
+            <a:avLst/>
+          </a:prstGeom>
+          <a:noFill/>
+        </p:spPr>
+        <p:txBody>
+          <a:bodyPr wrap="square" anchor="ctr" lIns="0" rIns="0" tIns="0" bIns="0">
+            <a:spAutoFit/>
+          </a:bodyPr>
+          <a:lstStyle/>
+          <a:p>
+            <a:pPr algn="ctr"/>
+            <a:r>
+              <a:rPr sz="1100" b="1" spc="-100">
+                <a:solidFill>
+                  <a:srgbClr val="3D2B1B"/>
+                </a:solidFill>
+                <a:latin typeface="Pretendard"/>
+                <a:ea typeface="Pretendard"/>
+              </a:rPr>
+              <a:t>공동구매</a:t>
+            </a:r>
+          </a:p>
+        </p:txBody>
+      </p:sp>
+      <p:cxnSp>
+        <p:nvCxnSpPr>
+          <p:cNvPr id="27" name="Connector 26"/>
+          <p:cNvCxnSpPr/>
+          <p:nvPr/>
+        </p:nvCxnSpPr>
+        <p:spPr>
+          <a:xfrm>
+            <a:off x="5111496" y="3538728"/>
+            <a:ext cx="182880" cy="0"/>
+          </a:xfrm>
+          <a:prstGeom prst="line">
+            <a:avLst/>
+          </a:prstGeom>
+          <a:ln w="16510">
+            <a:solidFill>
+              <a:srgbClr val="0E5A30"/>
+            </a:solidFill>
+            <a:prstDash val="dash"/>
+          </a:ln>
+          <a:effectLst/>
+        </p:spPr>
+        <p:style>
+          <a:lnRef idx="2">
+            <a:schemeClr val="accent1"/>
+          </a:lnRef>
+          <a:fillRef idx="0">
+            <a:schemeClr val="accent1"/>
+          </a:fillRef>
+          <a:effectRef idx="1">
+            <a:schemeClr val="accent1"/>
+          </a:effectRef>
+          <a:fontRef idx="minor">
+            <a:schemeClr val="tx1"/>
+          </a:fontRef>
+        </p:style>
+      </p:cxnSp>
+      <p:sp>
+        <p:nvSpPr>
+          <p:cNvPr id="28" name="Rounded Rectangle 27"/>
+          <p:cNvSpPr/>
+          <p:nvPr/>
+        </p:nvSpPr>
+        <p:spPr>
+          <a:xfrm>
+            <a:off x="5330952" y="3310128"/>
+            <a:ext cx="1371600" cy="457200"/>
+          </a:xfrm>
+          <a:prstGeom prst="roundRect">
+            <a:avLst>
+              <a:gd name="adj" fmla="val 8000"/>
+            </a:avLst>
+          </a:prstGeom>
+          <a:solidFill>
+            <a:srgbClr val="FFFFFF"/>
+          </a:solidFill>
+          <a:ln w="16510">
+            <a:solidFill>
+              <a:srgbClr val="3D2B1B"/>
+            </a:solidFill>
+          </a:ln>
+          <a:effectLst/>
+        </p:spPr>
+        <p:style>
+          <a:lnRef idx="1">
+            <a:schemeClr val="accent1"/>
+          </a:lnRef>
+          <a:fillRef idx="3">
+            <a:schemeClr val="accent1"/>
+          </a:fillRef>
+          <a:effectRef idx="2">
+            <a:schemeClr val="accent1"/>
+          </a:effectRef>
+          <a:fontRef idx="minor">
+            <a:schemeClr val="lt1"/>
+          </a:fontRef>
+        </p:style>
+        <p:txBody>
+          <a:bodyPr rtlCol="0" anchor="ctr"/>
+          <a:lstStyle/>
+          <a:p>
+            <a:pPr algn="ctr"/>
+          </a:p>
+        </p:txBody>
+      </p:sp>
+      <p:sp>
+        <p:nvSpPr>
+          <p:cNvPr id="29" name="TextBox 28"/>
+          <p:cNvSpPr txBox="1"/>
+          <p:nvPr/>
+        </p:nvSpPr>
+        <p:spPr>
+          <a:xfrm>
+            <a:off x="5330952" y="3310128"/>
+            <a:ext cx="1371600" cy="457200"/>
+          </a:xfrm>
+          <a:prstGeom prst="rect">
+            <a:avLst/>
+          </a:prstGeom>
+          <a:noFill/>
+        </p:spPr>
+        <p:txBody>
+          <a:bodyPr wrap="square" anchor="ctr" lIns="0" rIns="0" tIns="0" bIns="0">
+            <a:spAutoFit/>
+          </a:bodyPr>
+          <a:lstStyle/>
+          <a:p>
+            <a:pPr algn="ctr"/>
+            <a:r>
+              <a:rPr sz="1100" b="1" spc="-100">
+                <a:solidFill>
+                  <a:srgbClr val="141412"/>
+                </a:solidFill>
+                <a:latin typeface="Pretendard"/>
+                <a:ea typeface="Pretendard"/>
+              </a:rPr>
+              <a:t>② UGC</a:t>
+            </a:r>
+          </a:p>
+        </p:txBody>
+      </p:sp>
+      <p:cxnSp>
+        <p:nvCxnSpPr>
+          <p:cNvPr id="30" name="Connector 29"/>
+          <p:cNvCxnSpPr/>
+          <p:nvPr/>
+        </p:nvCxnSpPr>
+        <p:spPr>
+          <a:xfrm>
+            <a:off x="6016752" y="3785616"/>
+            <a:ext cx="0" cy="484632"/>
+          </a:xfrm>
+          <a:prstGeom prst="line">
+            <a:avLst/>
+          </a:prstGeom>
+          <a:ln w="15240">
+            <a:solidFill>
+              <a:srgbClr val="868680"/>
+            </a:solidFill>
+            <a:prstDash val="dash"/>
+          </a:ln>
+          <a:effectLst/>
+        </p:spPr>
+        <p:style>
+          <a:lnRef idx="2">
+            <a:schemeClr val="accent1"/>
+          </a:lnRef>
+          <a:fillRef idx="0">
+            <a:schemeClr val="accent1"/>
+          </a:fillRef>
+          <a:effectRef idx="1">
+            <a:schemeClr val="accent1"/>
+          </a:effectRef>
+          <a:fontRef idx="minor">
+            <a:schemeClr val="tx1"/>
+          </a:fontRef>
+        </p:style>
+      </p:cxnSp>
+      <p:sp>
+        <p:nvSpPr>
+          <p:cNvPr id="31" name="Rounded Rectangle 30"/>
+          <p:cNvSpPr/>
+          <p:nvPr/>
+        </p:nvSpPr>
+        <p:spPr>
+          <a:xfrm>
+            <a:off x="5330952" y="4270248"/>
+            <a:ext cx="1371600" cy="457200"/>
+          </a:xfrm>
+          <a:prstGeom prst="roundRect">
+            <a:avLst>
+              <a:gd name="adj" fmla="val 8000"/>
+            </a:avLst>
+          </a:prstGeom>
+          <a:solidFill>
+            <a:srgbClr val="F3F2E7"/>
+          </a:solidFill>
+          <a:ln w="16510">
+            <a:solidFill>
+              <a:srgbClr val="3D2B1B"/>
+            </a:solidFill>
+          </a:ln>
+          <a:effectLst/>
+        </p:spPr>
+        <p:style>
+          <a:lnRef idx="1">
+            <a:schemeClr val="accent1"/>
+          </a:lnRef>
+          <a:fillRef idx="3">
+            <a:schemeClr val="accent1"/>
+          </a:fillRef>
+          <a:effectRef idx="2">
+            <a:schemeClr val="accent1"/>
+          </a:effectRef>
+          <a:fontRef idx="minor">
+            <a:schemeClr val="lt1"/>
+          </a:fontRef>
+        </p:style>
+        <p:txBody>
+          <a:bodyPr rtlCol="0" anchor="ctr"/>
+          <a:lstStyle/>
+          <a:p>
+            <a:pPr algn="ctr"/>
+          </a:p>
+        </p:txBody>
+      </p:sp>
+      <p:sp>
+        <p:nvSpPr>
+          <p:cNvPr id="32" name="TextBox 31"/>
+          <p:cNvSpPr txBox="1"/>
+          <p:nvPr/>
+        </p:nvSpPr>
+        <p:spPr>
+          <a:xfrm>
+            <a:off x="5330952" y="4270248"/>
+            <a:ext cx="1371600" cy="457200"/>
+          </a:xfrm>
+          <a:prstGeom prst="rect">
+            <a:avLst/>
+          </a:prstGeom>
+          <a:noFill/>
+        </p:spPr>
+        <p:txBody>
+          <a:bodyPr wrap="square" anchor="ctr" lIns="0" rIns="0" tIns="0" bIns="0">
+            <a:spAutoFit/>
+          </a:bodyPr>
+          <a:lstStyle/>
+          <a:p>
+            <a:pPr algn="ctr"/>
+            <a:r>
+              <a:rPr sz="1100" b="1" spc="-100">
+                <a:solidFill>
+                  <a:srgbClr val="3D2B1B"/>
+                </a:solidFill>
+                <a:latin typeface="Pretendard"/>
+                <a:ea typeface="Pretendard"/>
+              </a:rPr>
+              <a:t>어필리에이트</a:t>
+            </a:r>
+          </a:p>
+        </p:txBody>
+      </p:sp>
+      <p:cxnSp>
+        <p:nvCxnSpPr>
+          <p:cNvPr id="33" name="Connector 32"/>
+          <p:cNvCxnSpPr/>
+          <p:nvPr/>
+        </p:nvCxnSpPr>
+        <p:spPr>
+          <a:xfrm>
+            <a:off x="6739128" y="3538728"/>
+            <a:ext cx="182879" cy="0"/>
+          </a:xfrm>
+          <a:prstGeom prst="line">
+            <a:avLst/>
+          </a:prstGeom>
+          <a:ln w="16510">
+            <a:solidFill>
+              <a:srgbClr val="0E5A30"/>
+            </a:solidFill>
+            <a:prstDash val="dash"/>
+          </a:ln>
+          <a:effectLst/>
+        </p:spPr>
+        <p:style>
+          <a:lnRef idx="2">
+            <a:schemeClr val="accent1"/>
+          </a:lnRef>
+          <a:fillRef idx="0">
+            <a:schemeClr val="accent1"/>
+          </a:fillRef>
+          <a:effectRef idx="1">
+            <a:schemeClr val="accent1"/>
+          </a:effectRef>
+          <a:fontRef idx="minor">
+            <a:schemeClr val="tx1"/>
+          </a:fontRef>
+        </p:style>
+      </p:cxnSp>
+      <p:sp>
+        <p:nvSpPr>
+          <p:cNvPr id="34" name="Rounded Rectangle 33"/>
+          <p:cNvSpPr/>
+          <p:nvPr/>
+        </p:nvSpPr>
+        <p:spPr>
+          <a:xfrm>
+            <a:off x="6958583" y="3310128"/>
+            <a:ext cx="1371600" cy="457200"/>
+          </a:xfrm>
+          <a:prstGeom prst="roundRect">
+            <a:avLst>
+              <a:gd name="adj" fmla="val 8000"/>
+            </a:avLst>
+          </a:prstGeom>
+          <a:solidFill>
+            <a:srgbClr val="FFFFFF"/>
+          </a:solidFill>
+          <a:ln w="16510">
+            <a:solidFill>
+              <a:srgbClr val="3D2B1B"/>
+            </a:solidFill>
+          </a:ln>
+          <a:effectLst/>
+        </p:spPr>
+        <p:style>
+          <a:lnRef idx="1">
+            <a:schemeClr val="accent1"/>
+          </a:lnRef>
+          <a:fillRef idx="3">
+            <a:schemeClr val="accent1"/>
+          </a:fillRef>
+          <a:effectRef idx="2">
+            <a:schemeClr val="accent1"/>
+          </a:effectRef>
+          <a:fontRef idx="minor">
+            <a:schemeClr val="lt1"/>
+          </a:fontRef>
+        </p:style>
+        <p:txBody>
+          <a:bodyPr rtlCol="0" anchor="ctr"/>
+          <a:lstStyle/>
+          <a:p>
+            <a:pPr algn="ctr"/>
+          </a:p>
+        </p:txBody>
+      </p:sp>
+      <p:sp>
+        <p:nvSpPr>
+          <p:cNvPr id="35" name="TextBox 34"/>
+          <p:cNvSpPr txBox="1"/>
+          <p:nvPr/>
+        </p:nvSpPr>
+        <p:spPr>
+          <a:xfrm>
+            <a:off x="6958583" y="3310128"/>
+            <a:ext cx="1371600" cy="457200"/>
+          </a:xfrm>
+          <a:prstGeom prst="rect">
+            <a:avLst/>
+          </a:prstGeom>
+          <a:noFill/>
+        </p:spPr>
+        <p:txBody>
+          <a:bodyPr wrap="square" anchor="ctr" lIns="0" rIns="0" tIns="0" bIns="0">
+            <a:spAutoFit/>
+          </a:bodyPr>
+          <a:lstStyle/>
+          <a:p>
+            <a:pPr algn="ctr"/>
+            <a:r>
+              <a:rPr sz="1100" b="1" spc="-100">
+                <a:solidFill>
+                  <a:srgbClr val="141412"/>
+                </a:solidFill>
+                <a:latin typeface="Pretendard"/>
+                <a:ea typeface="Pretendard"/>
+              </a:rPr>
+              <a:t>③ EGC</a:t>
+            </a:r>
+          </a:p>
+        </p:txBody>
+      </p:sp>
+      <p:cxnSp>
+        <p:nvCxnSpPr>
+          <p:cNvPr id="36" name="Connector 35"/>
+          <p:cNvCxnSpPr/>
+          <p:nvPr/>
+        </p:nvCxnSpPr>
+        <p:spPr>
+          <a:xfrm>
+            <a:off x="7644383" y="3785616"/>
+            <a:ext cx="0" cy="484632"/>
+          </a:xfrm>
+          <a:prstGeom prst="line">
+            <a:avLst/>
+          </a:prstGeom>
+          <a:ln w="15240">
+            <a:solidFill>
+              <a:srgbClr val="868680"/>
+            </a:solidFill>
+            <a:prstDash val="dash"/>
+          </a:ln>
+          <a:effectLst/>
+        </p:spPr>
+        <p:style>
+          <a:lnRef idx="2">
+            <a:schemeClr val="accent1"/>
+          </a:lnRef>
+          <a:fillRef idx="0">
+            <a:schemeClr val="accent1"/>
+          </a:fillRef>
+          <a:effectRef idx="1">
+            <a:schemeClr val="accent1"/>
+          </a:effectRef>
+          <a:fontRef idx="minor">
+            <a:schemeClr val="tx1"/>
+          </a:fontRef>
+        </p:style>
+      </p:cxnSp>
+      <p:sp>
+        <p:nvSpPr>
+          <p:cNvPr id="37" name="Rounded Rectangle 36"/>
+          <p:cNvSpPr/>
+          <p:nvPr/>
+        </p:nvSpPr>
+        <p:spPr>
+          <a:xfrm>
+            <a:off x="6958583" y="4270248"/>
+            <a:ext cx="1371600" cy="457200"/>
+          </a:xfrm>
+          <a:prstGeom prst="roundRect">
+            <a:avLst>
+              <a:gd name="adj" fmla="val 8000"/>
+            </a:avLst>
+          </a:prstGeom>
+          <a:solidFill>
+            <a:srgbClr val="F3F2E7"/>
+          </a:solidFill>
+          <a:ln w="16510">
+            <a:solidFill>
+              <a:srgbClr val="3D2B1B"/>
+            </a:solidFill>
+          </a:ln>
+          <a:effectLst/>
+        </p:spPr>
+        <p:style>
+          <a:lnRef idx="1">
+            <a:schemeClr val="accent1"/>
+          </a:lnRef>
+          <a:fillRef idx="3">
+            <a:schemeClr val="accent1"/>
+          </a:fillRef>
+          <a:effectRef idx="2">
+            <a:schemeClr val="accent1"/>
+          </a:effectRef>
+          <a:fontRef idx="minor">
+            <a:schemeClr val="lt1"/>
+          </a:fontRef>
+        </p:style>
+        <p:txBody>
+          <a:bodyPr rtlCol="0" anchor="ctr"/>
+          <a:lstStyle/>
+          <a:p>
+            <a:pPr algn="ctr"/>
+          </a:p>
+        </p:txBody>
+      </p:sp>
+      <p:sp>
+        <p:nvSpPr>
+          <p:cNvPr id="38" name="TextBox 37"/>
+          <p:cNvSpPr txBox="1"/>
+          <p:nvPr/>
+        </p:nvSpPr>
+        <p:spPr>
+          <a:xfrm>
+            <a:off x="6958583" y="4270248"/>
+            <a:ext cx="1371600" cy="457200"/>
+          </a:xfrm>
+          <a:prstGeom prst="rect">
+            <a:avLst/>
+          </a:prstGeom>
+          <a:noFill/>
+        </p:spPr>
+        <p:txBody>
+          <a:bodyPr wrap="square" anchor="ctr" lIns="0" rIns="0" tIns="0" bIns="0">
+            <a:spAutoFit/>
+          </a:bodyPr>
+          <a:lstStyle/>
+          <a:p>
+            <a:pPr algn="ctr"/>
+            <a:r>
+              <a:rPr sz="1100" b="1" spc="-100">
+                <a:solidFill>
+                  <a:srgbClr val="3D2B1B"/>
+                </a:solidFill>
+                <a:latin typeface="Pretendard"/>
+                <a:ea typeface="Pretendard"/>
+              </a:rPr>
+              <a:t>Half EGC</a:t>
+            </a:r>
+          </a:p>
+        </p:txBody>
+      </p:sp>
+      <p:sp>
+        <p:nvSpPr>
+          <p:cNvPr id="39" name="TextBox 38"/>
+          <p:cNvSpPr txBox="1"/>
+          <p:nvPr/>
+        </p:nvSpPr>
+        <p:spPr>
+          <a:xfrm>
+            <a:off x="3703320" y="4910328"/>
+            <a:ext cx="4526280" cy="274320"/>
+          </a:xfrm>
+          <a:prstGeom prst="rect">
+            <a:avLst/>
+          </a:prstGeom>
+          <a:noFill/>
+        </p:spPr>
+        <p:txBody>
+          <a:bodyPr wrap="square" anchor="t" lIns="0" rIns="0" tIns="0" bIns="0">
+            <a:spAutoFit/>
+          </a:bodyPr>
+          <a:lstStyle/>
+          <a:p>
+            <a:pPr algn="ctr"/>
+            <a:r>
+              <a:rPr sz="1000" b="1" spc="-100">
+                <a:solidFill>
+                  <a:srgbClr val="141412"/>
+                </a:solidFill>
+                <a:latin typeface="Pretendard"/>
+                <a:ea typeface="Pretendard"/>
+              </a:rPr>
+              <a:t>협업 플랫폼 사례</a:t>
+            </a:r>
+          </a:p>
+        </p:txBody>
+      </p:sp>
+      <p:sp>
+        <p:nvSpPr>
+          <p:cNvPr id="40" name="Oval 39"/>
+          <p:cNvSpPr/>
+          <p:nvPr/>
+        </p:nvSpPr>
+        <p:spPr>
+          <a:xfrm>
+            <a:off x="4914900" y="5230368"/>
+            <a:ext cx="566928" cy="566928"/>
+          </a:xfrm>
+          <a:prstGeom prst="ellipse">
+            <a:avLst/>
+          </a:prstGeom>
+          <a:solidFill>
+            <a:srgbClr val="FFFFFF"/>
+          </a:solidFill>
+          <a:ln w="16510">
+            <a:solidFill>
+              <a:srgbClr val="3D2B1B"/>
+            </a:solidFill>
+          </a:ln>
+          <a:effectLst/>
+        </p:spPr>
+        <p:style>
+          <a:lnRef idx="1">
+            <a:schemeClr val="accent1"/>
+          </a:lnRef>
+          <a:fillRef idx="3">
+            <a:schemeClr val="accent1"/>
+          </a:fillRef>
+          <a:effectRef idx="2">
+            <a:schemeClr val="accent1"/>
+          </a:effectRef>
+          <a:fontRef idx="minor">
+            <a:schemeClr val="lt1"/>
+          </a:fontRef>
+        </p:style>
+        <p:txBody>
+          <a:bodyPr rtlCol="0" anchor="ctr"/>
+          <a:lstStyle/>
+          <a:p>
+            <a:pPr algn="ctr"/>
+          </a:p>
+        </p:txBody>
+      </p:sp>
+      <p:sp>
+        <p:nvSpPr>
+          <p:cNvPr id="41" name="TextBox 40"/>
+          <p:cNvSpPr txBox="1"/>
+          <p:nvPr/>
+        </p:nvSpPr>
+        <p:spPr>
+          <a:xfrm>
+            <a:off x="4640580" y="5230368"/>
+            <a:ext cx="1115568" cy="566928"/>
+          </a:xfrm>
+          <a:prstGeom prst="rect">
+            <a:avLst/>
+          </a:prstGeom>
+          <a:noFill/>
+        </p:spPr>
+        <p:txBody>
+          <a:bodyPr wrap="square" anchor="ctr" lIns="0" rIns="0" tIns="0" bIns="0">
+            <a:spAutoFit/>
+          </a:bodyPr>
+          <a:lstStyle/>
+          <a:p>
+            <a:pPr algn="ctr"/>
+            <a:r>
+              <a:rPr sz="950" b="1" spc="-100">
+                <a:solidFill>
+                  <a:srgbClr val="3D2B1B"/>
+                </a:solidFill>
+                <a:latin typeface="Pretendard"/>
+                <a:ea typeface="Pretendard"/>
+              </a:rPr>
+              <a:t>Meta</a:t>
+            </a:r>
+          </a:p>
+        </p:txBody>
+      </p:sp>
+      <p:sp>
+        <p:nvSpPr>
+          <p:cNvPr id="42" name="Oval 41"/>
+          <p:cNvSpPr/>
+          <p:nvPr/>
+        </p:nvSpPr>
+        <p:spPr>
+          <a:xfrm>
+            <a:off x="6103620" y="5230368"/>
+            <a:ext cx="566928" cy="566928"/>
+          </a:xfrm>
+          <a:prstGeom prst="ellipse">
+            <a:avLst/>
+          </a:prstGeom>
+          <a:solidFill>
+            <a:srgbClr val="FFFFFF"/>
+          </a:solidFill>
+          <a:ln w="16510">
+            <a:solidFill>
+              <a:srgbClr val="3D2B1B"/>
+            </a:solidFill>
+          </a:ln>
+          <a:effectLst/>
+        </p:spPr>
+        <p:style>
+          <a:lnRef idx="1">
+            <a:schemeClr val="accent1"/>
+          </a:lnRef>
+          <a:fillRef idx="3">
+            <a:schemeClr val="accent1"/>
+          </a:fillRef>
+          <a:effectRef idx="2">
+            <a:schemeClr val="accent1"/>
+          </a:effectRef>
+          <a:fontRef idx="minor">
+            <a:schemeClr val="lt1"/>
+          </a:fontRef>
+        </p:style>
+        <p:txBody>
+          <a:bodyPr rtlCol="0" anchor="ctr"/>
+          <a:lstStyle/>
+          <a:p>
+            <a:pPr algn="ctr"/>
+          </a:p>
+        </p:txBody>
+      </p:sp>
+      <p:sp>
+        <p:nvSpPr>
+          <p:cNvPr id="43" name="TextBox 42"/>
+          <p:cNvSpPr txBox="1"/>
+          <p:nvPr/>
+        </p:nvSpPr>
+        <p:spPr>
+          <a:xfrm>
+            <a:off x="5829300" y="5230368"/>
+            <a:ext cx="1115568" cy="566928"/>
+          </a:xfrm>
+          <a:prstGeom prst="rect">
+            <a:avLst/>
+          </a:prstGeom>
+          <a:noFill/>
+        </p:spPr>
+        <p:txBody>
+          <a:bodyPr wrap="square" anchor="ctr" lIns="0" rIns="0" tIns="0" bIns="0">
+            <a:spAutoFit/>
+          </a:bodyPr>
+          <a:lstStyle/>
+          <a:p>
+            <a:pPr algn="ctr"/>
+            <a:r>
+              <a:rPr sz="950" b="1" spc="-100">
+                <a:solidFill>
+                  <a:srgbClr val="3D2B1B"/>
+                </a:solidFill>
+                <a:latin typeface="Pretendard"/>
+                <a:ea typeface="Pretendard"/>
+              </a:rPr>
+              <a:t>TikTok</a:t>
+            </a:r>
+          </a:p>
+        </p:txBody>
+      </p:sp>
+      <p:sp>
+        <p:nvSpPr>
+          <p:cNvPr id="44" name="Chevron 43"/>
+          <p:cNvSpPr/>
+          <p:nvPr/>
+        </p:nvSpPr>
+        <p:spPr>
+          <a:xfrm>
+            <a:off x="8540496" y="3950208"/>
+            <a:ext cx="365760" cy="256032"/>
+          </a:xfrm>
+          <a:prstGeom prst="chevron">
+            <a:avLst/>
+          </a:prstGeom>
+          <a:solidFill>
+            <a:srgbClr val="0E5A30"/>
+          </a:solidFill>
+          <a:ln>
+            <a:noFill/>
+          </a:ln>
+          <a:effectLst/>
+        </p:spPr>
+        <p:style>
+          <a:lnRef idx="1">
+            <a:schemeClr val="accent1"/>
+          </a:lnRef>
+          <a:fillRef idx="3">
+            <a:schemeClr val="accent1"/>
+          </a:fillRef>
+          <a:effectRef idx="2">
+            <a:schemeClr val="accent1"/>
+          </a:effectRef>
+          <a:fontRef idx="minor">
+            <a:schemeClr val="lt1"/>
+          </a:fontRef>
+        </p:style>
+        <p:txBody>
+          <a:bodyPr rtlCol="0" anchor="ctr"/>
+          <a:lstStyle/>
+          <a:p>
+            <a:pPr algn="ctr"/>
+          </a:p>
+        </p:txBody>
+      </p:sp>
+      <p:sp>
+        <p:nvSpPr>
+          <p:cNvPr id="45" name="Rounded Rectangle 44"/>
+          <p:cNvSpPr/>
+          <p:nvPr/>
+        </p:nvSpPr>
+        <p:spPr>
+          <a:xfrm>
+            <a:off x="8823960" y="2395728"/>
+            <a:ext cx="2862072" cy="3611880"/>
+          </a:xfrm>
+          <a:prstGeom prst="roundRect">
+            <a:avLst>
+              <a:gd name="adj" fmla="val 8000"/>
+            </a:avLst>
           </a:prstGeom>
           <a:solidFill>
             <a:srgbClr val="3D2B1B"/>
@@ -5315,1125 +6862,14 @@
       </p:sp>
       <p:sp>
         <p:nvSpPr>
-          <p:cNvPr id="8" name="TextBox 7"/>
+          <p:cNvPr id="46" name="TextBox 45"/>
           <p:cNvSpPr txBox="1"/>
           <p:nvPr/>
         </p:nvSpPr>
         <p:spPr>
           <a:xfrm>
-            <a:off x="822960" y="2331720"/>
-            <a:ext cx="2926080" cy="566928"/>
-          </a:xfrm>
-          <a:prstGeom prst="rect">
-            <a:avLst/>
-          </a:prstGeom>
-          <a:noFill/>
-        </p:spPr>
-        <p:txBody>
-          <a:bodyPr wrap="square" anchor="ctr" lIns="0" rIns="0" tIns="0" bIns="0">
-            <a:spAutoFit/>
-          </a:bodyPr>
-          <a:lstStyle/>
-          <a:p>
-            <a:pPr algn="ctr"/>
-            <a:r>
-              <a:rPr sz="1100" b="1" spc="-100">
-                <a:solidFill>
-                  <a:srgbClr val="C7CE3E"/>
-                </a:solidFill>
-                <a:latin typeface="Pretendard"/>
-                <a:ea typeface="Pretendard"/>
-              </a:rPr>
-              <a:t>STEP 1</a:t>
-            </a:r>
-          </a:p>
-        </p:txBody>
-      </p:sp>
-      <p:sp>
-        <p:nvSpPr>
-          <p:cNvPr id="9" name="TextBox 8"/>
-          <p:cNvSpPr txBox="1"/>
-          <p:nvPr/>
-        </p:nvSpPr>
-        <p:spPr>
-          <a:xfrm>
-            <a:off x="1005840" y="3035808"/>
-            <a:ext cx="2560320" cy="457200"/>
-          </a:xfrm>
-          <a:prstGeom prst="rect">
-            <a:avLst/>
-          </a:prstGeom>
-          <a:noFill/>
-        </p:spPr>
-        <p:txBody>
-          <a:bodyPr wrap="square" anchor="t" lIns="0" rIns="0" tIns="0" bIns="0">
-            <a:spAutoFit/>
-          </a:bodyPr>
-          <a:lstStyle/>
-          <a:p>
-            <a:pPr algn="ctr"/>
-            <a:r>
-              <a:rPr sz="1350" b="1" spc="-100">
-                <a:solidFill>
-                  <a:srgbClr val="141412"/>
-                </a:solidFill>
-                <a:latin typeface="Pretendard"/>
-                <a:ea typeface="Pretendard"/>
-              </a:rPr>
-              <a:t>레퍼런스 마케팅 Era</a:t>
-            </a:r>
-          </a:p>
-        </p:txBody>
-      </p:sp>
-      <p:sp>
-        <p:nvSpPr>
-          <p:cNvPr id="10" name="TextBox 9"/>
-          <p:cNvSpPr txBox="1"/>
-          <p:nvPr/>
-        </p:nvSpPr>
-        <p:spPr>
-          <a:xfrm>
-            <a:off x="1005840" y="3511296"/>
-            <a:ext cx="2560320" cy="310896"/>
-          </a:xfrm>
-          <a:prstGeom prst="rect">
-            <a:avLst/>
-          </a:prstGeom>
-          <a:noFill/>
-        </p:spPr>
-        <p:txBody>
-          <a:bodyPr wrap="square" anchor="t" lIns="0" rIns="0" tIns="0" bIns="0">
-            <a:spAutoFit/>
-          </a:bodyPr>
-          <a:lstStyle/>
-          <a:p>
-            <a:pPr algn="ctr"/>
-            <a:r>
-              <a:rPr sz="1050" b="1" spc="-100">
-                <a:solidFill>
-                  <a:srgbClr val="3D2B1B"/>
-                </a:solidFill>
-                <a:latin typeface="Pretendard"/>
-                <a:ea typeface="Pretendard"/>
-              </a:rPr>
-              <a:t>자사몰 중심</a:t>
-            </a:r>
-          </a:p>
-        </p:txBody>
-      </p:sp>
-      <p:sp>
-        <p:nvSpPr>
-          <p:cNvPr id="11" name="Oval 10"/>
-          <p:cNvSpPr/>
-          <p:nvPr/>
-        </p:nvSpPr>
-        <p:spPr>
-          <a:xfrm>
-            <a:off x="1874519" y="3977639"/>
-            <a:ext cx="822960" cy="822960"/>
-          </a:xfrm>
-          <a:prstGeom prst="ellipse">
-            <a:avLst/>
-          </a:prstGeom>
-          <a:solidFill>
-            <a:srgbClr val="F3F2E7"/>
-          </a:solidFill>
-          <a:ln w="19050">
-            <a:solidFill>
-              <a:srgbClr val="3D2B1B"/>
-            </a:solidFill>
-          </a:ln>
-          <a:effectLst/>
-        </p:spPr>
-        <p:style>
-          <a:lnRef idx="1">
-            <a:schemeClr val="accent1"/>
-          </a:lnRef>
-          <a:fillRef idx="3">
-            <a:schemeClr val="accent1"/>
-          </a:fillRef>
-          <a:effectRef idx="2">
-            <a:schemeClr val="accent1"/>
-          </a:effectRef>
-          <a:fontRef idx="minor">
-            <a:schemeClr val="lt1"/>
-          </a:fontRef>
-        </p:style>
-        <p:txBody>
-          <a:bodyPr rtlCol="0" anchor="ctr"/>
-          <a:lstStyle/>
-          <a:p>
-            <a:pPr algn="ctr"/>
-          </a:p>
-        </p:txBody>
-      </p:sp>
-      <p:sp>
-        <p:nvSpPr>
-          <p:cNvPr id="12" name="TextBox 11"/>
-          <p:cNvSpPr txBox="1"/>
-          <p:nvPr/>
-        </p:nvSpPr>
-        <p:spPr>
-          <a:xfrm>
-            <a:off x="1874519" y="3977639"/>
-            <a:ext cx="822960" cy="822960"/>
-          </a:xfrm>
-          <a:prstGeom prst="rect">
-            <a:avLst/>
-          </a:prstGeom>
-          <a:noFill/>
-        </p:spPr>
-        <p:txBody>
-          <a:bodyPr wrap="square" anchor="ctr" lIns="0" rIns="0" tIns="0" bIns="0">
-            <a:spAutoFit/>
-          </a:bodyPr>
-          <a:lstStyle/>
-          <a:p>
-            <a:pPr algn="ctr"/>
-            <a:r>
-              <a:rPr sz="1100" b="1" spc="-100">
-                <a:solidFill>
-                  <a:srgbClr val="3D2B1B"/>
-                </a:solidFill>
-                <a:latin typeface="Pretendard"/>
-                <a:ea typeface="Pretendard"/>
-              </a:rPr>
-              <a:t>미디어
-커머스</a:t>
-            </a:r>
-          </a:p>
-        </p:txBody>
-      </p:sp>
-      <p:sp>
-        <p:nvSpPr>
-          <p:cNvPr id="13" name="TextBox 12"/>
-          <p:cNvSpPr txBox="1"/>
-          <p:nvPr/>
-        </p:nvSpPr>
-        <p:spPr>
-          <a:xfrm>
-            <a:off x="1051560" y="4983480"/>
-            <a:ext cx="2468880" cy="777240"/>
-          </a:xfrm>
-          <a:prstGeom prst="rect">
-            <a:avLst/>
-          </a:prstGeom>
-          <a:noFill/>
-        </p:spPr>
-        <p:txBody>
-          <a:bodyPr wrap="square" anchor="t" lIns="0" rIns="0" tIns="0" bIns="0">
-            <a:spAutoFit/>
-          </a:bodyPr>
-          <a:lstStyle/>
-          <a:p>
-            <a:pPr algn="ctr"/>
-            <a:r>
-              <a:rPr sz="980" b="0" spc="-100">
-                <a:solidFill>
-                  <a:srgbClr val="868680"/>
-                </a:solidFill>
-                <a:latin typeface="Pretendard"/>
-                <a:ea typeface="Pretendard"/>
-              </a:rPr>
-              <a:t>자사몰·리테일 레퍼런스 중심으로 성장하던 시기</a:t>
-            </a:r>
-          </a:p>
-        </p:txBody>
-      </p:sp>
-      <p:sp>
-        <p:nvSpPr>
-          <p:cNvPr id="14" name="Chevron 13"/>
-          <p:cNvSpPr/>
-          <p:nvPr/>
-        </p:nvSpPr>
-        <p:spPr>
-          <a:xfrm>
-            <a:off x="3785616" y="3840480"/>
-            <a:ext cx="310896" cy="256032"/>
-          </a:xfrm>
-          <a:prstGeom prst="chevron">
-            <a:avLst/>
-          </a:prstGeom>
-          <a:solidFill>
-            <a:srgbClr val="0E5A30"/>
-          </a:solidFill>
-          <a:ln>
-            <a:noFill/>
-          </a:ln>
-          <a:effectLst/>
-        </p:spPr>
-        <p:style>
-          <a:lnRef idx="1">
-            <a:schemeClr val="accent1"/>
-          </a:lnRef>
-          <a:fillRef idx="3">
-            <a:schemeClr val="accent1"/>
-          </a:fillRef>
-          <a:effectRef idx="2">
-            <a:schemeClr val="accent1"/>
-          </a:effectRef>
-          <a:fontRef idx="minor">
-            <a:schemeClr val="lt1"/>
-          </a:fontRef>
-        </p:style>
-        <p:txBody>
-          <a:bodyPr rtlCol="0" anchor="ctr"/>
-          <a:lstStyle/>
-          <a:p>
-            <a:pPr algn="ctr"/>
-          </a:p>
-        </p:txBody>
-      </p:sp>
-      <p:sp>
-        <p:nvSpPr>
-          <p:cNvPr id="15" name="Rounded Rectangle 14"/>
-          <p:cNvSpPr/>
-          <p:nvPr/>
-        </p:nvSpPr>
-        <p:spPr>
-          <a:xfrm>
-            <a:off x="4206240" y="2331720"/>
-            <a:ext cx="3566160" cy="3520440"/>
-          </a:xfrm>
-          <a:prstGeom prst="roundRect">
-            <a:avLst>
-              <a:gd name="adj" fmla="val 8000"/>
-            </a:avLst>
-          </a:prstGeom>
-          <a:solidFill>
-            <a:srgbClr val="FFFFFF"/>
-          </a:solidFill>
-          <a:ln w="12700">
-            <a:solidFill>
-              <a:srgbClr val="C9C4B8"/>
-            </a:solidFill>
-          </a:ln>
-          <a:effectLst/>
-        </p:spPr>
-        <p:style>
-          <a:lnRef idx="1">
-            <a:schemeClr val="accent1"/>
-          </a:lnRef>
-          <a:fillRef idx="3">
-            <a:schemeClr val="accent1"/>
-          </a:fillRef>
-          <a:effectRef idx="2">
-            <a:schemeClr val="accent1"/>
-          </a:effectRef>
-          <a:fontRef idx="minor">
-            <a:schemeClr val="lt1"/>
-          </a:fontRef>
-        </p:style>
-        <p:txBody>
-          <a:bodyPr rtlCol="0" anchor="ctr"/>
-          <a:lstStyle/>
-          <a:p>
-            <a:pPr algn="ctr"/>
-          </a:p>
-        </p:txBody>
-      </p:sp>
-      <p:sp>
-        <p:nvSpPr>
-          <p:cNvPr id="16" name="Rectangle 15"/>
-          <p:cNvSpPr/>
-          <p:nvPr/>
-        </p:nvSpPr>
-        <p:spPr>
-          <a:xfrm>
-            <a:off x="4206240" y="2331720"/>
-            <a:ext cx="3566160" cy="566928"/>
-          </a:xfrm>
-          <a:prstGeom prst="rect">
-            <a:avLst/>
-          </a:prstGeom>
-          <a:solidFill>
-            <a:srgbClr val="3D2B1B"/>
-          </a:solidFill>
-          <a:ln>
-            <a:noFill/>
-          </a:ln>
-          <a:effectLst/>
-        </p:spPr>
-        <p:style>
-          <a:lnRef idx="1">
-            <a:schemeClr val="accent1"/>
-          </a:lnRef>
-          <a:fillRef idx="3">
-            <a:schemeClr val="accent1"/>
-          </a:fillRef>
-          <a:effectRef idx="2">
-            <a:schemeClr val="accent1"/>
-          </a:effectRef>
-          <a:fontRef idx="minor">
-            <a:schemeClr val="lt1"/>
-          </a:fontRef>
-        </p:style>
-        <p:txBody>
-          <a:bodyPr rtlCol="0" anchor="ctr"/>
-          <a:lstStyle/>
-          <a:p>
-            <a:pPr algn="ctr"/>
-          </a:p>
-        </p:txBody>
-      </p:sp>
-      <p:sp>
-        <p:nvSpPr>
-          <p:cNvPr id="17" name="TextBox 16"/>
-          <p:cNvSpPr txBox="1"/>
-          <p:nvPr/>
-        </p:nvSpPr>
-        <p:spPr>
-          <a:xfrm>
-            <a:off x="4206240" y="2331720"/>
-            <a:ext cx="3566160" cy="566928"/>
-          </a:xfrm>
-          <a:prstGeom prst="rect">
-            <a:avLst/>
-          </a:prstGeom>
-          <a:noFill/>
-        </p:spPr>
-        <p:txBody>
-          <a:bodyPr wrap="square" anchor="ctr" lIns="0" rIns="0" tIns="0" bIns="0">
-            <a:spAutoFit/>
-          </a:bodyPr>
-          <a:lstStyle/>
-          <a:p>
-            <a:pPr algn="ctr"/>
-            <a:r>
-              <a:rPr sz="1100" b="1" spc="-100">
-                <a:solidFill>
-                  <a:srgbClr val="C7CE3E"/>
-                </a:solidFill>
-                <a:latin typeface="Pretendard"/>
-                <a:ea typeface="Pretendard"/>
-              </a:rPr>
-              <a:t>STEP 2</a:t>
-            </a:r>
-          </a:p>
-        </p:txBody>
-      </p:sp>
-      <p:sp>
-        <p:nvSpPr>
-          <p:cNvPr id="18" name="TextBox 17"/>
-          <p:cNvSpPr txBox="1"/>
-          <p:nvPr/>
-        </p:nvSpPr>
-        <p:spPr>
-          <a:xfrm>
-            <a:off x="4389120" y="3035808"/>
-            <a:ext cx="3200400" cy="457200"/>
-          </a:xfrm>
-          <a:prstGeom prst="rect">
-            <a:avLst/>
-          </a:prstGeom>
-          <a:noFill/>
-        </p:spPr>
-        <p:txBody>
-          <a:bodyPr wrap="square" anchor="t" lIns="0" rIns="0" tIns="0" bIns="0">
-            <a:spAutoFit/>
-          </a:bodyPr>
-          <a:lstStyle/>
-          <a:p>
-            <a:pPr algn="ctr"/>
-            <a:r>
-              <a:rPr sz="1350" b="1" spc="-100">
-                <a:solidFill>
-                  <a:srgbClr val="141412"/>
-                </a:solidFill>
-                <a:latin typeface="Pretendard"/>
-                <a:ea typeface="Pretendard"/>
-              </a:rPr>
-              <a:t>인플루언서 마케팅 Era</a:t>
-            </a:r>
-          </a:p>
-        </p:txBody>
-      </p:sp>
-      <p:sp>
-        <p:nvSpPr>
-          <p:cNvPr id="19" name="TextBox 18"/>
-          <p:cNvSpPr txBox="1"/>
-          <p:nvPr/>
-        </p:nvSpPr>
-        <p:spPr>
-          <a:xfrm>
-            <a:off x="4389120" y="3511296"/>
-            <a:ext cx="3200400" cy="310896"/>
-          </a:xfrm>
-          <a:prstGeom prst="rect">
-            <a:avLst/>
-          </a:prstGeom>
-          <a:noFill/>
-        </p:spPr>
-        <p:txBody>
-          <a:bodyPr wrap="square" anchor="t" lIns="0" rIns="0" tIns="0" bIns="0">
-            <a:spAutoFit/>
-          </a:bodyPr>
-          <a:lstStyle/>
-          <a:p>
-            <a:pPr algn="ctr"/>
-            <a:r>
-              <a:rPr sz="1050" b="1" spc="-100">
-                <a:solidFill>
-                  <a:srgbClr val="3D2B1B"/>
-                </a:solidFill>
-                <a:latin typeface="Pretendard"/>
-                <a:ea typeface="Pretendard"/>
-              </a:rPr>
-              <a:t>B2C 광고·콘텐츠 그로스 중심</a:t>
-            </a:r>
-          </a:p>
-        </p:txBody>
-      </p:sp>
-      <p:sp>
-        <p:nvSpPr>
-          <p:cNvPr id="20" name="TextBox 19"/>
-          <p:cNvSpPr txBox="1"/>
-          <p:nvPr/>
-        </p:nvSpPr>
-        <p:spPr>
-          <a:xfrm>
-            <a:off x="4480559" y="3931920"/>
-            <a:ext cx="365760" cy="310896"/>
-          </a:xfrm>
-          <a:prstGeom prst="rect">
-            <a:avLst/>
-          </a:prstGeom>
-          <a:noFill/>
-        </p:spPr>
-        <p:txBody>
-          <a:bodyPr wrap="square" anchor="t" lIns="0" rIns="0" tIns="0" bIns="0">
-            <a:spAutoFit/>
-          </a:bodyPr>
-          <a:lstStyle/>
-          <a:p>
-            <a:pPr algn="l"/>
-            <a:r>
-              <a:rPr sz="1100" b="1" spc="-100">
-                <a:solidFill>
-                  <a:srgbClr val="3D2B1B"/>
-                </a:solidFill>
-                <a:latin typeface="Pretendard"/>
-                <a:ea typeface="Pretendard"/>
-              </a:rPr>
-              <a:t>①</a:t>
-            </a:r>
-          </a:p>
-        </p:txBody>
-      </p:sp>
-      <p:sp>
-        <p:nvSpPr>
-          <p:cNvPr id="21" name="TextBox 20"/>
-          <p:cNvSpPr txBox="1"/>
-          <p:nvPr/>
-        </p:nvSpPr>
-        <p:spPr>
-          <a:xfrm>
-            <a:off x="4864607" y="3931920"/>
-            <a:ext cx="1280160" cy="310896"/>
-          </a:xfrm>
-          <a:prstGeom prst="rect">
-            <a:avLst/>
-          </a:prstGeom>
-          <a:noFill/>
-        </p:spPr>
-        <p:txBody>
-          <a:bodyPr wrap="square" anchor="t" lIns="0" rIns="0" tIns="0" bIns="0">
-            <a:spAutoFit/>
-          </a:bodyPr>
-          <a:lstStyle/>
-          <a:p>
-            <a:pPr algn="l"/>
-            <a:r>
-              <a:rPr sz="1100" b="1" spc="-100">
-                <a:solidFill>
-                  <a:srgbClr val="141412"/>
-                </a:solidFill>
-                <a:latin typeface="Pretendard"/>
-                <a:ea typeface="Pretendard"/>
-              </a:rPr>
-              <a:t>MCN</a:t>
-            </a:r>
-          </a:p>
-        </p:txBody>
-      </p:sp>
-      <p:sp>
-        <p:nvSpPr>
-          <p:cNvPr id="22" name="TextBox 21"/>
-          <p:cNvSpPr txBox="1"/>
-          <p:nvPr/>
-        </p:nvSpPr>
-        <p:spPr>
-          <a:xfrm>
-            <a:off x="5989320" y="3931920"/>
-            <a:ext cx="365760" cy="310896"/>
-          </a:xfrm>
-          <a:prstGeom prst="rect">
-            <a:avLst/>
-          </a:prstGeom>
-          <a:noFill/>
-        </p:spPr>
-        <p:txBody>
-          <a:bodyPr wrap="square" anchor="t" lIns="0" rIns="0" tIns="0" bIns="0">
-            <a:spAutoFit/>
-          </a:bodyPr>
-          <a:lstStyle/>
-          <a:p>
-            <a:pPr algn="l"/>
-            <a:r>
-              <a:rPr sz="1100" b="1" spc="-100">
-                <a:solidFill>
-                  <a:srgbClr val="0E5A30"/>
-                </a:solidFill>
-                <a:latin typeface="Pretendard"/>
-                <a:ea typeface="Pretendard"/>
-              </a:rPr>
-              <a:t>→</a:t>
-            </a:r>
-          </a:p>
-        </p:txBody>
-      </p:sp>
-      <p:sp>
-        <p:nvSpPr>
-          <p:cNvPr id="23" name="TextBox 22"/>
-          <p:cNvSpPr txBox="1"/>
-          <p:nvPr/>
-        </p:nvSpPr>
-        <p:spPr>
-          <a:xfrm>
-            <a:off x="6355079" y="3931920"/>
-            <a:ext cx="1280160" cy="310896"/>
-          </a:xfrm>
-          <a:prstGeom prst="rect">
-            <a:avLst/>
-          </a:prstGeom>
-          <a:noFill/>
-        </p:spPr>
-        <p:txBody>
-          <a:bodyPr wrap="square" anchor="t" lIns="0" rIns="0" tIns="0" bIns="0">
-            <a:spAutoFit/>
-          </a:bodyPr>
-          <a:lstStyle/>
-          <a:p>
-            <a:pPr algn="l"/>
-            <a:r>
-              <a:rPr sz="1100" b="1" spc="-100">
-                <a:solidFill>
-                  <a:srgbClr val="141412"/>
-                </a:solidFill>
-                <a:latin typeface="Pretendard"/>
-                <a:ea typeface="Pretendard"/>
-              </a:rPr>
-              <a:t>공동구매</a:t>
-            </a:r>
-          </a:p>
-        </p:txBody>
-      </p:sp>
-      <p:sp>
-        <p:nvSpPr>
-          <p:cNvPr id="24" name="TextBox 23"/>
-          <p:cNvSpPr txBox="1"/>
-          <p:nvPr/>
-        </p:nvSpPr>
-        <p:spPr>
-          <a:xfrm>
-            <a:off x="4480559" y="4389120"/>
-            <a:ext cx="365760" cy="310896"/>
-          </a:xfrm>
-          <a:prstGeom prst="rect">
-            <a:avLst/>
-          </a:prstGeom>
-          <a:noFill/>
-        </p:spPr>
-        <p:txBody>
-          <a:bodyPr wrap="square" anchor="t" lIns="0" rIns="0" tIns="0" bIns="0">
-            <a:spAutoFit/>
-          </a:bodyPr>
-          <a:lstStyle/>
-          <a:p>
-            <a:pPr algn="l"/>
-            <a:r>
-              <a:rPr sz="1100" b="1" spc="-100">
-                <a:solidFill>
-                  <a:srgbClr val="3D2B1B"/>
-                </a:solidFill>
-                <a:latin typeface="Pretendard"/>
-                <a:ea typeface="Pretendard"/>
-              </a:rPr>
-              <a:t>②</a:t>
-            </a:r>
-          </a:p>
-        </p:txBody>
-      </p:sp>
-      <p:sp>
-        <p:nvSpPr>
-          <p:cNvPr id="25" name="TextBox 24"/>
-          <p:cNvSpPr txBox="1"/>
-          <p:nvPr/>
-        </p:nvSpPr>
-        <p:spPr>
-          <a:xfrm>
-            <a:off x="4864607" y="4389120"/>
-            <a:ext cx="1280160" cy="310896"/>
-          </a:xfrm>
-          <a:prstGeom prst="rect">
-            <a:avLst/>
-          </a:prstGeom>
-          <a:noFill/>
-        </p:spPr>
-        <p:txBody>
-          <a:bodyPr wrap="square" anchor="t" lIns="0" rIns="0" tIns="0" bIns="0">
-            <a:spAutoFit/>
-          </a:bodyPr>
-          <a:lstStyle/>
-          <a:p>
-            <a:pPr algn="l"/>
-            <a:r>
-              <a:rPr sz="1100" b="1" spc="-100">
-                <a:solidFill>
-                  <a:srgbClr val="141412"/>
-                </a:solidFill>
-                <a:latin typeface="Pretendard"/>
-                <a:ea typeface="Pretendard"/>
-              </a:rPr>
-              <a:t>UGC</a:t>
-            </a:r>
-          </a:p>
-        </p:txBody>
-      </p:sp>
-      <p:sp>
-        <p:nvSpPr>
-          <p:cNvPr id="26" name="TextBox 25"/>
-          <p:cNvSpPr txBox="1"/>
-          <p:nvPr/>
-        </p:nvSpPr>
-        <p:spPr>
-          <a:xfrm>
-            <a:off x="5989320" y="4389120"/>
-            <a:ext cx="365760" cy="310896"/>
-          </a:xfrm>
-          <a:prstGeom prst="rect">
-            <a:avLst/>
-          </a:prstGeom>
-          <a:noFill/>
-        </p:spPr>
-        <p:txBody>
-          <a:bodyPr wrap="square" anchor="t" lIns="0" rIns="0" tIns="0" bIns="0">
-            <a:spAutoFit/>
-          </a:bodyPr>
-          <a:lstStyle/>
-          <a:p>
-            <a:pPr algn="l"/>
-            <a:r>
-              <a:rPr sz="1100" b="1" spc="-100">
-                <a:solidFill>
-                  <a:srgbClr val="0E5A30"/>
-                </a:solidFill>
-                <a:latin typeface="Pretendard"/>
-                <a:ea typeface="Pretendard"/>
-              </a:rPr>
-              <a:t>→</a:t>
-            </a:r>
-          </a:p>
-        </p:txBody>
-      </p:sp>
-      <p:sp>
-        <p:nvSpPr>
-          <p:cNvPr id="27" name="TextBox 26"/>
-          <p:cNvSpPr txBox="1"/>
-          <p:nvPr/>
-        </p:nvSpPr>
-        <p:spPr>
-          <a:xfrm>
-            <a:off x="6355079" y="4389120"/>
-            <a:ext cx="1280160" cy="310896"/>
-          </a:xfrm>
-          <a:prstGeom prst="rect">
-            <a:avLst/>
-          </a:prstGeom>
-          <a:noFill/>
-        </p:spPr>
-        <p:txBody>
-          <a:bodyPr wrap="square" anchor="t" lIns="0" rIns="0" tIns="0" bIns="0">
-            <a:spAutoFit/>
-          </a:bodyPr>
-          <a:lstStyle/>
-          <a:p>
-            <a:pPr algn="l"/>
-            <a:r>
-              <a:rPr sz="1100" b="1" spc="-100">
-                <a:solidFill>
-                  <a:srgbClr val="141412"/>
-                </a:solidFill>
-                <a:latin typeface="Pretendard"/>
-                <a:ea typeface="Pretendard"/>
-              </a:rPr>
-              <a:t>어필리에이트</a:t>
-            </a:r>
-          </a:p>
-        </p:txBody>
-      </p:sp>
-      <p:sp>
-        <p:nvSpPr>
-          <p:cNvPr id="28" name="TextBox 27"/>
-          <p:cNvSpPr txBox="1"/>
-          <p:nvPr/>
-        </p:nvSpPr>
-        <p:spPr>
-          <a:xfrm>
-            <a:off x="4480559" y="4846320"/>
-            <a:ext cx="365760" cy="310896"/>
-          </a:xfrm>
-          <a:prstGeom prst="rect">
-            <a:avLst/>
-          </a:prstGeom>
-          <a:noFill/>
-        </p:spPr>
-        <p:txBody>
-          <a:bodyPr wrap="square" anchor="t" lIns="0" rIns="0" tIns="0" bIns="0">
-            <a:spAutoFit/>
-          </a:bodyPr>
-          <a:lstStyle/>
-          <a:p>
-            <a:pPr algn="l"/>
-            <a:r>
-              <a:rPr sz="1100" b="1" spc="-100">
-                <a:solidFill>
-                  <a:srgbClr val="3D2B1B"/>
-                </a:solidFill>
-                <a:latin typeface="Pretendard"/>
-                <a:ea typeface="Pretendard"/>
-              </a:rPr>
-              <a:t>③</a:t>
-            </a:r>
-          </a:p>
-        </p:txBody>
-      </p:sp>
-      <p:sp>
-        <p:nvSpPr>
-          <p:cNvPr id="29" name="TextBox 28"/>
-          <p:cNvSpPr txBox="1"/>
-          <p:nvPr/>
-        </p:nvSpPr>
-        <p:spPr>
-          <a:xfrm>
-            <a:off x="4864607" y="4846320"/>
-            <a:ext cx="1280160" cy="310896"/>
-          </a:xfrm>
-          <a:prstGeom prst="rect">
-            <a:avLst/>
-          </a:prstGeom>
-          <a:noFill/>
-        </p:spPr>
-        <p:txBody>
-          <a:bodyPr wrap="square" anchor="t" lIns="0" rIns="0" tIns="0" bIns="0">
-            <a:spAutoFit/>
-          </a:bodyPr>
-          <a:lstStyle/>
-          <a:p>
-            <a:pPr algn="l"/>
-            <a:r>
-              <a:rPr sz="1100" b="1" spc="-100">
-                <a:solidFill>
-                  <a:srgbClr val="141412"/>
-                </a:solidFill>
-                <a:latin typeface="Pretendard"/>
-                <a:ea typeface="Pretendard"/>
-              </a:rPr>
-              <a:t>EGC</a:t>
-            </a:r>
-          </a:p>
-        </p:txBody>
-      </p:sp>
-      <p:sp>
-        <p:nvSpPr>
-          <p:cNvPr id="30" name="TextBox 29"/>
-          <p:cNvSpPr txBox="1"/>
-          <p:nvPr/>
-        </p:nvSpPr>
-        <p:spPr>
-          <a:xfrm>
-            <a:off x="5989320" y="4846320"/>
-            <a:ext cx="365760" cy="310896"/>
-          </a:xfrm>
-          <a:prstGeom prst="rect">
-            <a:avLst/>
-          </a:prstGeom>
-          <a:noFill/>
-        </p:spPr>
-        <p:txBody>
-          <a:bodyPr wrap="square" anchor="t" lIns="0" rIns="0" tIns="0" bIns="0">
-            <a:spAutoFit/>
-          </a:bodyPr>
-          <a:lstStyle/>
-          <a:p>
-            <a:pPr algn="l"/>
-            <a:r>
-              <a:rPr sz="1100" b="1" spc="-100">
-                <a:solidFill>
-                  <a:srgbClr val="0E5A30"/>
-                </a:solidFill>
-                <a:latin typeface="Pretendard"/>
-                <a:ea typeface="Pretendard"/>
-              </a:rPr>
-              <a:t>→</a:t>
-            </a:r>
-          </a:p>
-        </p:txBody>
-      </p:sp>
-      <p:sp>
-        <p:nvSpPr>
-          <p:cNvPr id="31" name="TextBox 30"/>
-          <p:cNvSpPr txBox="1"/>
-          <p:nvPr/>
-        </p:nvSpPr>
-        <p:spPr>
-          <a:xfrm>
-            <a:off x="6355079" y="4846320"/>
-            <a:ext cx="1280160" cy="310896"/>
-          </a:xfrm>
-          <a:prstGeom prst="rect">
-            <a:avLst/>
-          </a:prstGeom>
-          <a:noFill/>
-        </p:spPr>
-        <p:txBody>
-          <a:bodyPr wrap="square" anchor="t" lIns="0" rIns="0" tIns="0" bIns="0">
-            <a:spAutoFit/>
-          </a:bodyPr>
-          <a:lstStyle/>
-          <a:p>
-            <a:pPr algn="l"/>
-            <a:r>
-              <a:rPr sz="1100" b="1" spc="-100">
-                <a:solidFill>
-                  <a:srgbClr val="141412"/>
-                </a:solidFill>
-                <a:latin typeface="Pretendard"/>
-                <a:ea typeface="Pretendard"/>
-              </a:rPr>
-              <a:t>Half EGC</a:t>
-            </a:r>
-          </a:p>
-        </p:txBody>
-      </p:sp>
-      <p:sp>
-        <p:nvSpPr>
-          <p:cNvPr id="32" name="Rounded Rectangle 31"/>
-          <p:cNvSpPr/>
-          <p:nvPr/>
-        </p:nvSpPr>
-        <p:spPr>
-          <a:xfrm>
-            <a:off x="4480559" y="5358384"/>
-            <a:ext cx="3017520" cy="384048"/>
-          </a:xfrm>
-          <a:prstGeom prst="roundRect">
-            <a:avLst>
-              <a:gd name="adj" fmla="val 8000"/>
-            </a:avLst>
-          </a:prstGeom>
-          <a:solidFill>
-            <a:srgbClr val="F3F2E7"/>
-          </a:solidFill>
-          <a:ln>
-            <a:noFill/>
-          </a:ln>
-          <a:effectLst/>
-        </p:spPr>
-        <p:style>
-          <a:lnRef idx="1">
-            <a:schemeClr val="accent1"/>
-          </a:lnRef>
-          <a:fillRef idx="3">
-            <a:schemeClr val="accent1"/>
-          </a:fillRef>
-          <a:effectRef idx="2">
-            <a:schemeClr val="accent1"/>
-          </a:effectRef>
-          <a:fontRef idx="minor">
-            <a:schemeClr val="lt1"/>
-          </a:fontRef>
-        </p:style>
-        <p:txBody>
-          <a:bodyPr rtlCol="0" anchor="ctr"/>
-          <a:lstStyle/>
-          <a:p>
-            <a:pPr algn="ctr"/>
-          </a:p>
-        </p:txBody>
-      </p:sp>
-      <p:sp>
-        <p:nvSpPr>
-          <p:cNvPr id="33" name="TextBox 32"/>
-          <p:cNvSpPr txBox="1"/>
-          <p:nvPr/>
-        </p:nvSpPr>
-        <p:spPr>
-          <a:xfrm>
-            <a:off x="4480559" y="5358384"/>
-            <a:ext cx="3017520" cy="384048"/>
-          </a:xfrm>
-          <a:prstGeom prst="rect">
-            <a:avLst/>
-          </a:prstGeom>
-          <a:noFill/>
-        </p:spPr>
-        <p:txBody>
-          <a:bodyPr wrap="square" anchor="ctr" lIns="0" rIns="0" tIns="0" bIns="0">
-            <a:spAutoFit/>
-          </a:bodyPr>
-          <a:lstStyle/>
-          <a:p>
-            <a:pPr algn="ctr"/>
-            <a:r>
-              <a:rPr sz="1000" b="1" spc="-100">
-                <a:solidFill>
-                  <a:srgbClr val="141412"/>
-                </a:solidFill>
-                <a:latin typeface="Pretendard"/>
-                <a:ea typeface="Pretendard"/>
-              </a:rPr>
-              <a:t>협업 플랫폼 ·  Meta  ·  TikTok</a:t>
-            </a:r>
-          </a:p>
-        </p:txBody>
-      </p:sp>
-      <p:sp>
-        <p:nvSpPr>
-          <p:cNvPr id="34" name="Chevron 33"/>
-          <p:cNvSpPr/>
-          <p:nvPr/>
-        </p:nvSpPr>
-        <p:spPr>
-          <a:xfrm>
-            <a:off x="7808975" y="3840480"/>
-            <a:ext cx="310896" cy="256032"/>
-          </a:xfrm>
-          <a:prstGeom prst="chevron">
-            <a:avLst/>
-          </a:prstGeom>
-          <a:solidFill>
-            <a:srgbClr val="0E5A30"/>
-          </a:solidFill>
-          <a:ln>
-            <a:noFill/>
-          </a:ln>
-          <a:effectLst/>
-        </p:spPr>
-        <p:style>
-          <a:lnRef idx="1">
-            <a:schemeClr val="accent1"/>
-          </a:lnRef>
-          <a:fillRef idx="3">
-            <a:schemeClr val="accent1"/>
-          </a:fillRef>
-          <a:effectRef idx="2">
-            <a:schemeClr val="accent1"/>
-          </a:effectRef>
-          <a:fontRef idx="minor">
-            <a:schemeClr val="lt1"/>
-          </a:fontRef>
-        </p:style>
-        <p:txBody>
-          <a:bodyPr rtlCol="0" anchor="ctr"/>
-          <a:lstStyle/>
-          <a:p>
-            <a:pPr algn="ctr"/>
-          </a:p>
-        </p:txBody>
-      </p:sp>
-      <p:sp>
-        <p:nvSpPr>
-          <p:cNvPr id="35" name="Rounded Rectangle 34"/>
-          <p:cNvSpPr/>
-          <p:nvPr/>
-        </p:nvSpPr>
-        <p:spPr>
-          <a:xfrm>
-            <a:off x="8138160" y="2331720"/>
-            <a:ext cx="3227832" cy="3520440"/>
-          </a:xfrm>
-          <a:prstGeom prst="roundRect">
-            <a:avLst>
-              <a:gd name="adj" fmla="val 8000"/>
-            </a:avLst>
-          </a:prstGeom>
-          <a:solidFill>
-            <a:srgbClr val="3D2B1B"/>
-          </a:solidFill>
-          <a:ln>
-            <a:noFill/>
-          </a:ln>
-          <a:effectLst/>
-        </p:spPr>
-        <p:style>
-          <a:lnRef idx="1">
-            <a:schemeClr val="accent1"/>
-          </a:lnRef>
-          <a:fillRef idx="3">
-            <a:schemeClr val="accent1"/>
-          </a:fillRef>
-          <a:effectRef idx="2">
-            <a:schemeClr val="accent1"/>
-          </a:effectRef>
-          <a:fontRef idx="minor">
-            <a:schemeClr val="lt1"/>
-          </a:fontRef>
-        </p:style>
-        <p:txBody>
-          <a:bodyPr rtlCol="0" anchor="ctr"/>
-          <a:lstStyle/>
-          <a:p>
-            <a:pPr algn="ctr"/>
-          </a:p>
-        </p:txBody>
-      </p:sp>
-      <p:sp>
-        <p:nvSpPr>
-          <p:cNvPr id="36" name="TextBox 35"/>
-          <p:cNvSpPr txBox="1"/>
-          <p:nvPr/>
-        </p:nvSpPr>
-        <p:spPr>
-          <a:xfrm>
-            <a:off x="8138160" y="2468880"/>
-            <a:ext cx="3227832" cy="310896"/>
-          </a:xfrm>
-          <a:prstGeom prst="rect">
-            <a:avLst/>
-          </a:prstGeom>
-          <a:noFill/>
-        </p:spPr>
-        <p:txBody>
-          <a:bodyPr wrap="square" anchor="t" lIns="0" rIns="0" tIns="0" bIns="0">
-            <a:spAutoFit/>
-          </a:bodyPr>
-          <a:lstStyle/>
-          <a:p>
-            <a:pPr algn="ctr"/>
-            <a:r>
-              <a:rPr sz="1050" b="1" spc="100">
-                <a:solidFill>
-                  <a:srgbClr val="C7CE3E"/>
-                </a:solidFill>
-                <a:latin typeface="Pretendard"/>
-                <a:ea typeface="Pretendard"/>
-              </a:rPr>
-              <a:t>2026.06 · WHAT’S NEXT?</a:t>
-            </a:r>
-          </a:p>
-        </p:txBody>
-      </p:sp>
-      <p:sp>
-        <p:nvSpPr>
-          <p:cNvPr id="37" name="TextBox 36"/>
-          <p:cNvSpPr txBox="1"/>
-          <p:nvPr/>
-        </p:nvSpPr>
-        <p:spPr>
-          <a:xfrm>
-            <a:off x="8138160" y="2798064"/>
-            <a:ext cx="3227832" cy="548640"/>
+            <a:off x="8823960" y="2578608"/>
+            <a:ext cx="2862072" cy="457200"/>
           </a:xfrm>
           <a:prstGeom prst="rect">
             <a:avLst/>
@@ -6462,14 +6898,14 @@
       </p:sp>
       <p:sp>
         <p:nvSpPr>
-          <p:cNvPr id="38" name="Oval 37"/>
+          <p:cNvPr id="47" name="Oval 46"/>
           <p:cNvSpPr/>
           <p:nvPr/>
         </p:nvSpPr>
         <p:spPr>
           <a:xfrm>
-            <a:off x="8595360" y="3429000"/>
-            <a:ext cx="1234440" cy="1234440"/>
+            <a:off x="9235440" y="3264408"/>
+            <a:ext cx="1188720" cy="1188720"/>
           </a:xfrm>
           <a:prstGeom prst="ellipse">
             <a:avLst/>
@@ -6506,14 +6942,14 @@
       </p:sp>
       <p:sp>
         <p:nvSpPr>
-          <p:cNvPr id="39" name="Oval 38"/>
+          <p:cNvPr id="48" name="Oval 47"/>
           <p:cNvSpPr/>
           <p:nvPr/>
         </p:nvSpPr>
         <p:spPr>
           <a:xfrm>
-            <a:off x="9555480" y="3429000"/>
-            <a:ext cx="1234440" cy="1234440"/>
+            <a:off x="10085832" y="3264408"/>
+            <a:ext cx="1188720" cy="1188720"/>
           </a:xfrm>
           <a:prstGeom prst="ellipse">
             <a:avLst/>
@@ -6550,14 +6986,14 @@
       </p:sp>
       <p:sp>
         <p:nvSpPr>
-          <p:cNvPr id="40" name="TextBox 39"/>
+          <p:cNvPr id="49" name="TextBox 48"/>
           <p:cNvSpPr txBox="1"/>
           <p:nvPr/>
         </p:nvSpPr>
         <p:spPr>
           <a:xfrm>
-            <a:off x="8503920" y="3822191"/>
-            <a:ext cx="1097280" cy="365760"/>
+            <a:off x="9144000" y="3721608"/>
+            <a:ext cx="1188720" cy="365760"/>
           </a:xfrm>
           <a:prstGeom prst="rect">
             <a:avLst/>
@@ -6572,7 +7008,7 @@
           <a:p>
             <a:pPr algn="ctr"/>
             <a:r>
-              <a:rPr sz="950" b="1" spc="-100">
+              <a:rPr sz="900" b="1" spc="-100">
                 <a:solidFill>
                   <a:srgbClr val="FFFFFF"/>
                 </a:solidFill>
@@ -6586,14 +7022,14 @@
       </p:sp>
       <p:sp>
         <p:nvSpPr>
-          <p:cNvPr id="41" name="TextBox 40"/>
+          <p:cNvPr id="50" name="TextBox 49"/>
           <p:cNvSpPr txBox="1"/>
           <p:nvPr/>
         </p:nvSpPr>
         <p:spPr>
           <a:xfrm>
-            <a:off x="9875520" y="3822191"/>
-            <a:ext cx="1097280" cy="365760"/>
+            <a:off x="9994392" y="3721608"/>
+            <a:ext cx="1188720" cy="365760"/>
           </a:xfrm>
           <a:prstGeom prst="rect">
             <a:avLst/>
@@ -6608,7 +7044,7 @@
           <a:p>
             <a:pPr algn="ctr"/>
             <a:r>
-              <a:rPr sz="950" b="1" spc="-100">
+              <a:rPr sz="900" b="1" spc="-100">
                 <a:solidFill>
                   <a:srgbClr val="FFFFFF"/>
                 </a:solidFill>
@@ -6622,14 +7058,14 @@
       </p:sp>
       <p:sp>
         <p:nvSpPr>
-          <p:cNvPr id="42" name="TextBox 41"/>
+          <p:cNvPr id="51" name="TextBox 50"/>
           <p:cNvSpPr txBox="1"/>
           <p:nvPr/>
         </p:nvSpPr>
         <p:spPr>
           <a:xfrm>
-            <a:off x="8449056" y="4937760"/>
-            <a:ext cx="2679191" cy="274320"/>
+            <a:off x="8823960" y="4498848"/>
+            <a:ext cx="2862072" cy="274320"/>
           </a:xfrm>
           <a:prstGeom prst="rect">
             <a:avLst/>
@@ -6642,9 +7078,45 @@
           </a:bodyPr>
           <a:lstStyle/>
           <a:p>
+            <a:pPr algn="ctr"/>
+            <a:r>
+              <a:rPr sz="950" b="1" spc="-100">
+                <a:solidFill>
+                  <a:srgbClr val="C7CE3E"/>
+                </a:solidFill>
+                <a:latin typeface="Pretendard"/>
+                <a:ea typeface="Pretendard"/>
+              </a:rPr>
+              <a:t>교집합 = 우리의 해답</a:t>
+            </a:r>
+          </a:p>
+        </p:txBody>
+      </p:sp>
+      <p:sp>
+        <p:nvSpPr>
+          <p:cNvPr id="52" name="TextBox 51"/>
+          <p:cNvSpPr txBox="1"/>
+          <p:nvPr/>
+        </p:nvSpPr>
+        <p:spPr>
+          <a:xfrm>
+            <a:off x="9144000" y="4910328"/>
+            <a:ext cx="2313432" cy="274320"/>
+          </a:xfrm>
+          <a:prstGeom prst="rect">
+            <a:avLst/>
+          </a:prstGeom>
+          <a:noFill/>
+        </p:spPr>
+        <p:txBody>
+          <a:bodyPr wrap="square" anchor="t" lIns="0" rIns="0" tIns="0" bIns="0">
+            <a:spAutoFit/>
+          </a:bodyPr>
+          <a:lstStyle/>
+          <a:p>
             <a:pPr algn="l"/>
             <a:r>
-              <a:rPr sz="1000" b="1" spc="-100">
+              <a:rPr sz="1050" b="1" spc="-100">
                 <a:solidFill>
                   <a:srgbClr val="C7CE3E"/>
                 </a:solidFill>
@@ -6658,14 +7130,14 @@
       </p:sp>
       <p:sp>
         <p:nvSpPr>
-          <p:cNvPr id="43" name="TextBox 42"/>
+          <p:cNvPr id="53" name="TextBox 52"/>
           <p:cNvSpPr txBox="1"/>
           <p:nvPr/>
         </p:nvSpPr>
         <p:spPr>
           <a:xfrm>
-            <a:off x="8449056" y="5239512"/>
-            <a:ext cx="2679191" cy="274320"/>
+            <a:off x="9144000" y="5221224"/>
+            <a:ext cx="2313432" cy="274320"/>
           </a:xfrm>
           <a:prstGeom prst="rect">
             <a:avLst/>
@@ -6680,7 +7152,7 @@
           <a:p>
             <a:pPr algn="l"/>
             <a:r>
-              <a:rPr sz="1000" b="1" spc="-100">
+              <a:rPr sz="1050" b="1" spc="-100">
                 <a:solidFill>
                   <a:srgbClr val="C7CE3E"/>
                 </a:solidFill>
@@ -6694,14 +7166,14 @@
       </p:sp>
       <p:sp>
         <p:nvSpPr>
-          <p:cNvPr id="44" name="TextBox 43"/>
+          <p:cNvPr id="54" name="TextBox 53"/>
           <p:cNvSpPr txBox="1"/>
           <p:nvPr/>
         </p:nvSpPr>
         <p:spPr>
           <a:xfrm>
-            <a:off x="8449056" y="5541264"/>
-            <a:ext cx="2679191" cy="274320"/>
+            <a:off x="9144000" y="5532120"/>
+            <a:ext cx="2313432" cy="274320"/>
           </a:xfrm>
           <a:prstGeom prst="rect">
             <a:avLst/>
@@ -6716,7 +7188,7 @@
           <a:p>
             <a:pPr algn="l"/>
             <a:r>
-              <a:rPr sz="1000" b="1" spc="-100">
+              <a:rPr sz="1050" b="1" spc="-100">
                 <a:solidFill>
                   <a:srgbClr val="C7CE3E"/>
                 </a:solidFill>
@@ -6730,137 +7202,13 @@
       </p:sp>
       <p:sp>
         <p:nvSpPr>
-          <p:cNvPr id="45" name="Rectangle 44"/>
-          <p:cNvSpPr/>
-          <p:nvPr/>
-        </p:nvSpPr>
-        <p:spPr>
-          <a:xfrm>
-            <a:off x="822960" y="6144768"/>
-            <a:ext cx="10543032" cy="457200"/>
-          </a:xfrm>
-          <a:prstGeom prst="rect">
-            <a:avLst/>
-          </a:prstGeom>
-          <a:solidFill>
-            <a:srgbClr val="F3F2E7"/>
-          </a:solidFill>
-          <a:ln>
-            <a:noFill/>
-          </a:ln>
-          <a:effectLst/>
-        </p:spPr>
-        <p:style>
-          <a:lnRef idx="1">
-            <a:schemeClr val="accent1"/>
-          </a:lnRef>
-          <a:fillRef idx="3">
-            <a:schemeClr val="accent1"/>
-          </a:fillRef>
-          <a:effectRef idx="2">
-            <a:schemeClr val="accent1"/>
-          </a:effectRef>
-          <a:fontRef idx="minor">
-            <a:schemeClr val="lt1"/>
-          </a:fontRef>
-        </p:style>
-        <p:txBody>
-          <a:bodyPr rtlCol="0" anchor="ctr"/>
-          <a:lstStyle/>
-          <a:p>
-            <a:pPr algn="ctr"/>
-          </a:p>
-        </p:txBody>
-      </p:sp>
-      <p:sp>
-        <p:nvSpPr>
-          <p:cNvPr id="46" name="Rectangle 45"/>
-          <p:cNvSpPr/>
-          <p:nvPr/>
-        </p:nvSpPr>
-        <p:spPr>
-          <a:xfrm>
-            <a:off x="822960" y="6144768"/>
-            <a:ext cx="82296" cy="457200"/>
-          </a:xfrm>
-          <a:prstGeom prst="rect">
-            <a:avLst/>
-          </a:prstGeom>
-          <a:solidFill>
-            <a:srgbClr val="3D2B1B"/>
-          </a:solidFill>
-          <a:ln>
-            <a:noFill/>
-          </a:ln>
-          <a:effectLst/>
-        </p:spPr>
-        <p:style>
-          <a:lnRef idx="1">
-            <a:schemeClr val="accent1"/>
-          </a:lnRef>
-          <a:fillRef idx="3">
-            <a:schemeClr val="accent1"/>
-          </a:fillRef>
-          <a:effectRef idx="2">
-            <a:schemeClr val="accent1"/>
-          </a:effectRef>
-          <a:fontRef idx="minor">
-            <a:schemeClr val="lt1"/>
-          </a:fontRef>
-        </p:style>
-        <p:txBody>
-          <a:bodyPr rtlCol="0" anchor="ctr"/>
-          <a:lstStyle/>
-          <a:p>
-            <a:pPr algn="ctr"/>
-          </a:p>
-        </p:txBody>
-      </p:sp>
-      <p:sp>
-        <p:nvSpPr>
-          <p:cNvPr id="47" name="TextBox 46"/>
+          <p:cNvPr id="55" name="TextBox 54"/>
           <p:cNvSpPr txBox="1"/>
           <p:nvPr/>
         </p:nvSpPr>
         <p:spPr>
           <a:xfrm>
-            <a:off x="1097280" y="6144768"/>
-            <a:ext cx="10058400" cy="457200"/>
-          </a:xfrm>
-          <a:prstGeom prst="rect">
-            <a:avLst/>
-          </a:prstGeom>
-          <a:noFill/>
-        </p:spPr>
-        <p:txBody>
-          <a:bodyPr wrap="square" anchor="ctr" lIns="0" rIns="0" tIns="0" bIns="0">
-            <a:spAutoFit/>
-          </a:bodyPr>
-          <a:lstStyle/>
-          <a:p>
-            <a:pPr algn="ctr"/>
-            <a:r>
-              <a:rPr sz="1250" b="1" spc="-100">
-                <a:solidFill>
-                  <a:srgbClr val="141412"/>
-                </a:solidFill>
-                <a:latin typeface="Pretendard"/>
-                <a:ea typeface="Pretendard"/>
-              </a:rPr>
-              <a:t>인플루언서 × 퍼포먼스의 교집합 — Micro-IMC가 올더베러의 다음 해답</a:t>
-            </a:r>
-          </a:p>
-        </p:txBody>
-      </p:sp>
-      <p:sp>
-        <p:nvSpPr>
-          <p:cNvPr id="48" name="TextBox 47"/>
-          <p:cNvSpPr txBox="1"/>
-          <p:nvPr/>
-        </p:nvSpPr>
-        <p:spPr>
-          <a:xfrm>
-            <a:off x="5637276" y="6437376"/>
+            <a:off x="5637276" y="6446520"/>
             <a:ext cx="914400" cy="274320"/>
           </a:xfrm>
           <a:prstGeom prst="rect">
